--- a/AI_Chatbot_Presentation.pptx
+++ b/AI_Chatbot_Presentation.pptx
@@ -5,24 +5,23 @@
     <p:sldMasterId id="2147483648" r:id="rId1"/>
   </p:sldMasterIdLst>
   <p:sldIdLst>
-    <p:sldId id="256" r:id="rId7"/>
-    <p:sldId id="257" r:id="rId8"/>
-    <p:sldId id="258" r:id="rId9"/>
-    <p:sldId id="259" r:id="rId10"/>
-    <p:sldId id="260" r:id="rId11"/>
-    <p:sldId id="261" r:id="rId12"/>
-    <p:sldId id="262" r:id="rId13"/>
-    <p:sldId id="263" r:id="rId14"/>
-    <p:sldId id="264" r:id="rId15"/>
-    <p:sldId id="265" r:id="rId16"/>
-    <p:sldId id="266" r:id="rId17"/>
-    <p:sldId id="267" r:id="rId18"/>
-    <p:sldId id="268" r:id="rId19"/>
-    <p:sldId id="269" r:id="rId20"/>
-    <p:sldId id="270" r:id="rId21"/>
-    <p:sldId id="271" r:id="rId22"/>
+    <p:sldId id="256" r:id="rId2"/>
+    <p:sldId id="257" r:id="rId3"/>
+    <p:sldId id="258" r:id="rId4"/>
+    <p:sldId id="259" r:id="rId5"/>
+    <p:sldId id="260" r:id="rId6"/>
+    <p:sldId id="261" r:id="rId7"/>
+    <p:sldId id="262" r:id="rId8"/>
+    <p:sldId id="263" r:id="rId9"/>
+    <p:sldId id="264" r:id="rId10"/>
+    <p:sldId id="265" r:id="rId11"/>
+    <p:sldId id="266" r:id="rId12"/>
+    <p:sldId id="267" r:id="rId13"/>
+    <p:sldId id="268" r:id="rId14"/>
+    <p:sldId id="269" r:id="rId15"/>
+    <p:sldId id="271" r:id="rId16"/>
   </p:sldIdLst>
-  <p:sldSz cx="12191695" cy="6858000" type="screen4x3"/>
+  <p:sldSz cx="12192000" cy="6858000"/>
   <p:notesSz cx="6858000" cy="9144000"/>
   <p:defaultTextStyle>
     <a:defPPr>
@@ -119,6 +118,22 @@
       </a:defRPr>
     </a:lvl9pPr>
   </p:defaultTextStyle>
+  <p:extLst>
+    <p:ext uri="{EFAFB233-063F-42B5-8137-9DF3F51BA10A}">
+      <p15:sldGuideLst xmlns:p15="http://schemas.microsoft.com/office/powerpoint/2012/main">
+        <p15:guide id="1" orient="horz" pos="2160">
+          <p15:clr>
+            <a:srgbClr val="A4A3A4"/>
+          </p15:clr>
+        </p15:guide>
+        <p15:guide id="2" pos="2880">
+          <p15:clr>
+            <a:srgbClr val="A4A3A4"/>
+          </p15:clr>
+        </p15:guide>
+      </p15:sldGuideLst>
+    </p:ext>
+  </p:extLst>
 </p:presentation>
 </file>
 
@@ -160,10 +175,9 @@
           <a:lstStyle/>
           <a:p>
             <a:r>
-              <a:rPr lang="en-US" smtClean="0"/>
+              <a:rPr lang="en-US"/>
               <a:t>Click to edit Master title style</a:t>
             </a:r>
-            <a:endParaRPr lang="en-US"/>
           </a:p>
         </p:txBody>
       </p:sp>
@@ -279,10 +293,9 @@
           </a:lstStyle>
           <a:p>
             <a:r>
-              <a:rPr lang="en-US" smtClean="0"/>
+              <a:rPr lang="en-US"/>
               <a:t>Click to edit Master subtitle style</a:t>
             </a:r>
-            <a:endParaRPr lang="en-US"/>
           </a:p>
         </p:txBody>
       </p:sp>
@@ -303,7 +316,7 @@
           <a:p>
             <a:fld id="{5BCAD085-E8A6-8845-BD4E-CB4CCA059FC4}" type="datetimeFigureOut">
               <a:rPr lang="en-US" smtClean="0"/>
-              <a:t>1/27/13</a:t>
+              <a:t>10/22/2026</a:t>
             </a:fld>
             <a:endParaRPr lang="en-US"/>
           </a:p>
@@ -397,10 +410,9 @@
           <a:lstStyle/>
           <a:p>
             <a:r>
-              <a:rPr lang="en-US" smtClean="0"/>
+              <a:rPr lang="en-US"/>
               <a:t>Click to edit Master title style</a:t>
             </a:r>
-            <a:endParaRPr lang="en-US"/>
           </a:p>
         </p:txBody>
       </p:sp>
@@ -421,38 +433,37 @@
           <a:p>
             <a:pPr lvl="0"/>
             <a:r>
-              <a:rPr lang="en-US" smtClean="0"/>
+              <a:rPr lang="en-US"/>
               <a:t>Click to edit Master text styles</a:t>
             </a:r>
           </a:p>
           <a:p>
             <a:pPr lvl="1"/>
             <a:r>
-              <a:rPr lang="en-US" smtClean="0"/>
+              <a:rPr lang="en-US"/>
               <a:t>Second level</a:t>
             </a:r>
           </a:p>
           <a:p>
             <a:pPr lvl="2"/>
             <a:r>
-              <a:rPr lang="en-US" smtClean="0"/>
+              <a:rPr lang="en-US"/>
               <a:t>Third level</a:t>
             </a:r>
           </a:p>
           <a:p>
             <a:pPr lvl="3"/>
             <a:r>
-              <a:rPr lang="en-US" smtClean="0"/>
+              <a:rPr lang="en-US"/>
               <a:t>Fourth level</a:t>
             </a:r>
           </a:p>
           <a:p>
             <a:pPr lvl="4"/>
             <a:r>
-              <a:rPr lang="en-US" smtClean="0"/>
+              <a:rPr lang="en-US"/>
               <a:t>Fifth level</a:t>
             </a:r>
-            <a:endParaRPr lang="en-US"/>
           </a:p>
         </p:txBody>
       </p:sp>
@@ -473,7 +484,7 @@
           <a:p>
             <a:fld id="{5BCAD085-E8A6-8845-BD4E-CB4CCA059FC4}" type="datetimeFigureOut">
               <a:rPr lang="en-US" smtClean="0"/>
-              <a:t>1/27/13</a:t>
+              <a:t>10/22/2026</a:t>
             </a:fld>
             <a:endParaRPr lang="en-US"/>
           </a:p>
@@ -572,10 +583,9 @@
           <a:lstStyle/>
           <a:p>
             <a:r>
-              <a:rPr lang="en-US" smtClean="0"/>
+              <a:rPr lang="en-US"/>
               <a:t>Click to edit Master title style</a:t>
             </a:r>
-            <a:endParaRPr lang="en-US"/>
           </a:p>
         </p:txBody>
       </p:sp>
@@ -601,38 +611,37 @@
           <a:p>
             <a:pPr lvl="0"/>
             <a:r>
-              <a:rPr lang="en-US" smtClean="0"/>
+              <a:rPr lang="en-US"/>
               <a:t>Click to edit Master text styles</a:t>
             </a:r>
           </a:p>
           <a:p>
             <a:pPr lvl="1"/>
             <a:r>
-              <a:rPr lang="en-US" smtClean="0"/>
+              <a:rPr lang="en-US"/>
               <a:t>Second level</a:t>
             </a:r>
           </a:p>
           <a:p>
             <a:pPr lvl="2"/>
             <a:r>
-              <a:rPr lang="en-US" smtClean="0"/>
+              <a:rPr lang="en-US"/>
               <a:t>Third level</a:t>
             </a:r>
           </a:p>
           <a:p>
             <a:pPr lvl="3"/>
             <a:r>
-              <a:rPr lang="en-US" smtClean="0"/>
+              <a:rPr lang="en-US"/>
               <a:t>Fourth level</a:t>
             </a:r>
           </a:p>
           <a:p>
             <a:pPr lvl="4"/>
             <a:r>
-              <a:rPr lang="en-US" smtClean="0"/>
+              <a:rPr lang="en-US"/>
               <a:t>Fifth level</a:t>
             </a:r>
-            <a:endParaRPr lang="en-US"/>
           </a:p>
         </p:txBody>
       </p:sp>
@@ -653,7 +662,7 @@
           <a:p>
             <a:fld id="{5BCAD085-E8A6-8845-BD4E-CB4CCA059FC4}" type="datetimeFigureOut">
               <a:rPr lang="en-US" smtClean="0"/>
-              <a:t>1/27/13</a:t>
+              <a:t>10/22/2026</a:t>
             </a:fld>
             <a:endParaRPr lang="en-US"/>
           </a:p>
@@ -747,10 +756,9 @@
           <a:lstStyle/>
           <a:p>
             <a:r>
-              <a:rPr lang="en-US" smtClean="0"/>
+              <a:rPr lang="en-US"/>
               <a:t>Click to edit Master title style</a:t>
             </a:r>
-            <a:endParaRPr lang="en-US"/>
           </a:p>
         </p:txBody>
       </p:sp>
@@ -771,38 +779,37 @@
           <a:p>
             <a:pPr lvl="0"/>
             <a:r>
-              <a:rPr lang="en-US" smtClean="0"/>
+              <a:rPr lang="en-US"/>
               <a:t>Click to edit Master text styles</a:t>
             </a:r>
           </a:p>
           <a:p>
             <a:pPr lvl="1"/>
             <a:r>
-              <a:rPr lang="en-US" smtClean="0"/>
+              <a:rPr lang="en-US"/>
               <a:t>Second level</a:t>
             </a:r>
           </a:p>
           <a:p>
             <a:pPr lvl="2"/>
             <a:r>
-              <a:rPr lang="en-US" smtClean="0"/>
+              <a:rPr lang="en-US"/>
               <a:t>Third level</a:t>
             </a:r>
           </a:p>
           <a:p>
             <a:pPr lvl="3"/>
             <a:r>
-              <a:rPr lang="en-US" smtClean="0"/>
+              <a:rPr lang="en-US"/>
               <a:t>Fourth level</a:t>
             </a:r>
           </a:p>
           <a:p>
             <a:pPr lvl="4"/>
             <a:r>
-              <a:rPr lang="en-US" smtClean="0"/>
+              <a:rPr lang="en-US"/>
               <a:t>Fifth level</a:t>
             </a:r>
-            <a:endParaRPr lang="en-US"/>
           </a:p>
         </p:txBody>
       </p:sp>
@@ -823,7 +830,7 @@
           <a:p>
             <a:fld id="{5BCAD085-E8A6-8845-BD4E-CB4CCA059FC4}" type="datetimeFigureOut">
               <a:rPr lang="en-US" smtClean="0"/>
-              <a:t>1/27/13</a:t>
+              <a:t>10/22/2026</a:t>
             </a:fld>
             <a:endParaRPr lang="en-US"/>
           </a:p>
@@ -926,10 +933,9 @@
           </a:lstStyle>
           <a:p>
             <a:r>
-              <a:rPr lang="en-US" smtClean="0"/>
+              <a:rPr lang="en-US"/>
               <a:t>Click to edit Master title style</a:t>
             </a:r>
-            <a:endParaRPr lang="en-US"/>
           </a:p>
         </p:txBody>
       </p:sp>
@@ -1046,7 +1052,7 @@
           <a:p>
             <a:pPr lvl="0"/>
             <a:r>
-              <a:rPr lang="en-US" smtClean="0"/>
+              <a:rPr lang="en-US"/>
               <a:t>Click to edit Master text styles</a:t>
             </a:r>
           </a:p>
@@ -1069,7 +1075,7 @@
           <a:p>
             <a:fld id="{5BCAD085-E8A6-8845-BD4E-CB4CCA059FC4}" type="datetimeFigureOut">
               <a:rPr lang="en-US" smtClean="0"/>
-              <a:t>1/27/13</a:t>
+              <a:t>10/22/2026</a:t>
             </a:fld>
             <a:endParaRPr lang="en-US"/>
           </a:p>
@@ -1163,10 +1169,9 @@
           <a:lstStyle/>
           <a:p>
             <a:r>
-              <a:rPr lang="en-US" smtClean="0"/>
+              <a:rPr lang="en-US"/>
               <a:t>Click to edit Master title style</a:t>
             </a:r>
-            <a:endParaRPr lang="en-US"/>
           </a:p>
         </p:txBody>
       </p:sp>
@@ -1220,38 +1225,37 @@
           <a:p>
             <a:pPr lvl="0"/>
             <a:r>
-              <a:rPr lang="en-US" smtClean="0"/>
+              <a:rPr lang="en-US"/>
               <a:t>Click to edit Master text styles</a:t>
             </a:r>
           </a:p>
           <a:p>
             <a:pPr lvl="1"/>
             <a:r>
-              <a:rPr lang="en-US" smtClean="0"/>
+              <a:rPr lang="en-US"/>
               <a:t>Second level</a:t>
             </a:r>
           </a:p>
           <a:p>
             <a:pPr lvl="2"/>
             <a:r>
-              <a:rPr lang="en-US" smtClean="0"/>
+              <a:rPr lang="en-US"/>
               <a:t>Third level</a:t>
             </a:r>
           </a:p>
           <a:p>
             <a:pPr lvl="3"/>
             <a:r>
-              <a:rPr lang="en-US" smtClean="0"/>
+              <a:rPr lang="en-US"/>
               <a:t>Fourth level</a:t>
             </a:r>
           </a:p>
           <a:p>
             <a:pPr lvl="4"/>
             <a:r>
-              <a:rPr lang="en-US" smtClean="0"/>
+              <a:rPr lang="en-US"/>
               <a:t>Fifth level</a:t>
             </a:r>
-            <a:endParaRPr lang="en-US"/>
           </a:p>
         </p:txBody>
       </p:sp>
@@ -1305,38 +1309,37 @@
           <a:p>
             <a:pPr lvl="0"/>
             <a:r>
-              <a:rPr lang="en-US" smtClean="0"/>
+              <a:rPr lang="en-US"/>
               <a:t>Click to edit Master text styles</a:t>
             </a:r>
           </a:p>
           <a:p>
             <a:pPr lvl="1"/>
             <a:r>
-              <a:rPr lang="en-US" smtClean="0"/>
+              <a:rPr lang="en-US"/>
               <a:t>Second level</a:t>
             </a:r>
           </a:p>
           <a:p>
             <a:pPr lvl="2"/>
             <a:r>
-              <a:rPr lang="en-US" smtClean="0"/>
+              <a:rPr lang="en-US"/>
               <a:t>Third level</a:t>
             </a:r>
           </a:p>
           <a:p>
             <a:pPr lvl="3"/>
             <a:r>
-              <a:rPr lang="en-US" smtClean="0"/>
+              <a:rPr lang="en-US"/>
               <a:t>Fourth level</a:t>
             </a:r>
           </a:p>
           <a:p>
             <a:pPr lvl="4"/>
             <a:r>
-              <a:rPr lang="en-US" smtClean="0"/>
+              <a:rPr lang="en-US"/>
               <a:t>Fifth level</a:t>
             </a:r>
-            <a:endParaRPr lang="en-US"/>
           </a:p>
         </p:txBody>
       </p:sp>
@@ -1357,7 +1360,7 @@
           <a:p>
             <a:fld id="{5BCAD085-E8A6-8845-BD4E-CB4CCA059FC4}" type="datetimeFigureOut">
               <a:rPr lang="en-US" smtClean="0"/>
-              <a:t>1/27/13</a:t>
+              <a:t>10/22/2026</a:t>
             </a:fld>
             <a:endParaRPr lang="en-US"/>
           </a:p>
@@ -1455,10 +1458,9 @@
           </a:lstStyle>
           <a:p>
             <a:r>
-              <a:rPr lang="en-US" smtClean="0"/>
+              <a:rPr lang="en-US"/>
               <a:t>Click to edit Master title style</a:t>
             </a:r>
-            <a:endParaRPr lang="en-US"/>
           </a:p>
         </p:txBody>
       </p:sp>
@@ -1521,7 +1523,7 @@
           <a:p>
             <a:pPr lvl="0"/>
             <a:r>
-              <a:rPr lang="en-US" smtClean="0"/>
+              <a:rPr lang="en-US"/>
               <a:t>Click to edit Master text styles</a:t>
             </a:r>
           </a:p>
@@ -1577,38 +1579,37 @@
           <a:p>
             <a:pPr lvl="0"/>
             <a:r>
-              <a:rPr lang="en-US" smtClean="0"/>
+              <a:rPr lang="en-US"/>
               <a:t>Click to edit Master text styles</a:t>
             </a:r>
           </a:p>
           <a:p>
             <a:pPr lvl="1"/>
             <a:r>
-              <a:rPr lang="en-US" smtClean="0"/>
+              <a:rPr lang="en-US"/>
               <a:t>Second level</a:t>
             </a:r>
           </a:p>
           <a:p>
             <a:pPr lvl="2"/>
             <a:r>
-              <a:rPr lang="en-US" smtClean="0"/>
+              <a:rPr lang="en-US"/>
               <a:t>Third level</a:t>
             </a:r>
           </a:p>
           <a:p>
             <a:pPr lvl="3"/>
             <a:r>
-              <a:rPr lang="en-US" smtClean="0"/>
+              <a:rPr lang="en-US"/>
               <a:t>Fourth level</a:t>
             </a:r>
           </a:p>
           <a:p>
             <a:pPr lvl="4"/>
             <a:r>
-              <a:rPr lang="en-US" smtClean="0"/>
+              <a:rPr lang="en-US"/>
               <a:t>Fifth level</a:t>
             </a:r>
-            <a:endParaRPr lang="en-US"/>
           </a:p>
         </p:txBody>
       </p:sp>
@@ -1671,7 +1672,7 @@
           <a:p>
             <a:pPr lvl="0"/>
             <a:r>
-              <a:rPr lang="en-US" smtClean="0"/>
+              <a:rPr lang="en-US"/>
               <a:t>Click to edit Master text styles</a:t>
             </a:r>
           </a:p>
@@ -1727,38 +1728,37 @@
           <a:p>
             <a:pPr lvl="0"/>
             <a:r>
-              <a:rPr lang="en-US" smtClean="0"/>
+              <a:rPr lang="en-US"/>
               <a:t>Click to edit Master text styles</a:t>
             </a:r>
           </a:p>
           <a:p>
             <a:pPr lvl="1"/>
             <a:r>
-              <a:rPr lang="en-US" smtClean="0"/>
+              <a:rPr lang="en-US"/>
               <a:t>Second level</a:t>
             </a:r>
           </a:p>
           <a:p>
             <a:pPr lvl="2"/>
             <a:r>
-              <a:rPr lang="en-US" smtClean="0"/>
+              <a:rPr lang="en-US"/>
               <a:t>Third level</a:t>
             </a:r>
           </a:p>
           <a:p>
             <a:pPr lvl="3"/>
             <a:r>
-              <a:rPr lang="en-US" smtClean="0"/>
+              <a:rPr lang="en-US"/>
               <a:t>Fourth level</a:t>
             </a:r>
           </a:p>
           <a:p>
             <a:pPr lvl="4"/>
             <a:r>
-              <a:rPr lang="en-US" smtClean="0"/>
+              <a:rPr lang="en-US"/>
               <a:t>Fifth level</a:t>
             </a:r>
-            <a:endParaRPr lang="en-US"/>
           </a:p>
         </p:txBody>
       </p:sp>
@@ -1779,7 +1779,7 @@
           <a:p>
             <a:fld id="{5BCAD085-E8A6-8845-BD4E-CB4CCA059FC4}" type="datetimeFigureOut">
               <a:rPr lang="en-US" smtClean="0"/>
-              <a:t>1/27/13</a:t>
+              <a:t>10/22/2026</a:t>
             </a:fld>
             <a:endParaRPr lang="en-US"/>
           </a:p>
@@ -1873,10 +1873,9 @@
           <a:lstStyle/>
           <a:p>
             <a:r>
-              <a:rPr lang="en-US" smtClean="0"/>
+              <a:rPr lang="en-US"/>
               <a:t>Click to edit Master title style</a:t>
             </a:r>
-            <a:endParaRPr lang="en-US"/>
           </a:p>
         </p:txBody>
       </p:sp>
@@ -1897,7 +1896,7 @@
           <a:p>
             <a:fld id="{5BCAD085-E8A6-8845-BD4E-CB4CCA059FC4}" type="datetimeFigureOut">
               <a:rPr lang="en-US" smtClean="0"/>
-              <a:t>1/27/13</a:t>
+              <a:t>10/22/2026</a:t>
             </a:fld>
             <a:endParaRPr lang="en-US"/>
           </a:p>
@@ -1992,7 +1991,7 @@
           <a:p>
             <a:fld id="{5BCAD085-E8A6-8845-BD4E-CB4CCA059FC4}" type="datetimeFigureOut">
               <a:rPr lang="en-US" smtClean="0"/>
-              <a:t>1/27/13</a:t>
+              <a:t>10/22/2026</a:t>
             </a:fld>
             <a:endParaRPr lang="en-US"/>
           </a:p>
@@ -2095,10 +2094,9 @@
           </a:lstStyle>
           <a:p>
             <a:r>
-              <a:rPr lang="en-US" smtClean="0"/>
+              <a:rPr lang="en-US"/>
               <a:t>Click to edit Master title style</a:t>
             </a:r>
-            <a:endParaRPr lang="en-US"/>
           </a:p>
         </p:txBody>
       </p:sp>
@@ -2152,38 +2150,37 @@
           <a:p>
             <a:pPr lvl="0"/>
             <a:r>
-              <a:rPr lang="en-US" smtClean="0"/>
+              <a:rPr lang="en-US"/>
               <a:t>Click to edit Master text styles</a:t>
             </a:r>
           </a:p>
           <a:p>
             <a:pPr lvl="1"/>
             <a:r>
-              <a:rPr lang="en-US" smtClean="0"/>
+              <a:rPr lang="en-US"/>
               <a:t>Second level</a:t>
             </a:r>
           </a:p>
           <a:p>
             <a:pPr lvl="2"/>
             <a:r>
-              <a:rPr lang="en-US" smtClean="0"/>
+              <a:rPr lang="en-US"/>
               <a:t>Third level</a:t>
             </a:r>
           </a:p>
           <a:p>
             <a:pPr lvl="3"/>
             <a:r>
-              <a:rPr lang="en-US" smtClean="0"/>
+              <a:rPr lang="en-US"/>
               <a:t>Fourth level</a:t>
             </a:r>
           </a:p>
           <a:p>
             <a:pPr lvl="4"/>
             <a:r>
-              <a:rPr lang="en-US" smtClean="0"/>
+              <a:rPr lang="en-US"/>
               <a:t>Fifth level</a:t>
             </a:r>
-            <a:endParaRPr lang="en-US"/>
           </a:p>
         </p:txBody>
       </p:sp>
@@ -2246,7 +2243,7 @@
           <a:p>
             <a:pPr lvl="0"/>
             <a:r>
-              <a:rPr lang="en-US" smtClean="0"/>
+              <a:rPr lang="en-US"/>
               <a:t>Click to edit Master text styles</a:t>
             </a:r>
           </a:p>
@@ -2269,7 +2266,7 @@
           <a:p>
             <a:fld id="{5BCAD085-E8A6-8845-BD4E-CB4CCA059FC4}" type="datetimeFigureOut">
               <a:rPr lang="en-US" smtClean="0"/>
-              <a:t>1/27/13</a:t>
+              <a:t>10/22/2026</a:t>
             </a:fld>
             <a:endParaRPr lang="en-US"/>
           </a:p>
@@ -2372,10 +2369,9 @@
           </a:lstStyle>
           <a:p>
             <a:r>
-              <a:rPr lang="en-US" smtClean="0"/>
+              <a:rPr lang="en-US"/>
               <a:t>Click to edit Master title style</a:t>
             </a:r>
-            <a:endParaRPr lang="en-US"/>
           </a:p>
         </p:txBody>
       </p:sp>
@@ -2499,7 +2495,7 @@
           <a:p>
             <a:pPr lvl="0"/>
             <a:r>
-              <a:rPr lang="en-US" smtClean="0"/>
+              <a:rPr lang="en-US"/>
               <a:t>Click to edit Master text styles</a:t>
             </a:r>
           </a:p>
@@ -2522,7 +2518,7 @@
           <a:p>
             <a:fld id="{5BCAD085-E8A6-8845-BD4E-CB4CCA059FC4}" type="datetimeFigureOut">
               <a:rPr lang="en-US" smtClean="0"/>
-              <a:t>1/27/13</a:t>
+              <a:t>10/22/2026</a:t>
             </a:fld>
             <a:endParaRPr lang="en-US"/>
           </a:p>
@@ -2631,10 +2627,9 @@
           <a:lstStyle/>
           <a:p>
             <a:r>
-              <a:rPr lang="en-US" smtClean="0"/>
+              <a:rPr lang="en-US"/>
               <a:t>Click to edit Master title style</a:t>
             </a:r>
-            <a:endParaRPr lang="en-US"/>
           </a:p>
         </p:txBody>
       </p:sp>
@@ -2665,38 +2660,37 @@
           <a:p>
             <a:pPr lvl="0"/>
             <a:r>
-              <a:rPr lang="en-US" smtClean="0"/>
+              <a:rPr lang="en-US"/>
               <a:t>Click to edit Master text styles</a:t>
             </a:r>
           </a:p>
           <a:p>
             <a:pPr lvl="1"/>
             <a:r>
-              <a:rPr lang="en-US" smtClean="0"/>
+              <a:rPr lang="en-US"/>
               <a:t>Second level</a:t>
             </a:r>
           </a:p>
           <a:p>
             <a:pPr lvl="2"/>
             <a:r>
-              <a:rPr lang="en-US" smtClean="0"/>
+              <a:rPr lang="en-US"/>
               <a:t>Third level</a:t>
             </a:r>
           </a:p>
           <a:p>
             <a:pPr lvl="3"/>
             <a:r>
-              <a:rPr lang="en-US" smtClean="0"/>
+              <a:rPr lang="en-US"/>
               <a:t>Fourth level</a:t>
             </a:r>
           </a:p>
           <a:p>
             <a:pPr lvl="4"/>
             <a:r>
-              <a:rPr lang="en-US" smtClean="0"/>
+              <a:rPr lang="en-US"/>
               <a:t>Fifth level</a:t>
             </a:r>
-            <a:endParaRPr lang="en-US"/>
           </a:p>
         </p:txBody>
       </p:sp>
@@ -2735,7 +2729,7 @@
           <a:p>
             <a:fld id="{5BCAD085-E8A6-8845-BD4E-CB4CCA059FC4}" type="datetimeFigureOut">
               <a:rPr lang="en-US" smtClean="0"/>
-              <a:t>1/27/13</a:t>
+              <a:t>10/22/2026</a:t>
             </a:fld>
             <a:endParaRPr lang="en-US"/>
           </a:p>
@@ -3094,7 +3088,7 @@
 </file>
 
 <file path=ppt/slides/slide1.xml><?xml version="1.0" encoding="utf-8"?>
-<p:sld xmlns:a="http://schemas.openxmlformats.org/drawingml/2006/main" xmlns:p="http://schemas.openxmlformats.org/presentationml/2006/main" xmlns:r="http://schemas.openxmlformats.org/officeDocument/2006/relationships">
+<p:sld xmlns:a="http://schemas.openxmlformats.org/drawingml/2006/main" xmlns:r="http://schemas.openxmlformats.org/officeDocument/2006/relationships" xmlns:p="http://schemas.openxmlformats.org/presentationml/2006/main">
   <p:cSld>
     <p:bg>
       <p:bgPr>
@@ -3110,7 +3104,14 @@
         <p:cNvGrpSpPr/>
         <p:nvPr/>
       </p:nvGrpSpPr>
-      <p:grpSpPr/>
+      <p:grpSpPr>
+        <a:xfrm>
+          <a:off x="0" y="0"/>
+          <a:ext cx="0" cy="0"/>
+          <a:chOff x="0" y="0"/>
+          <a:chExt cx="0" cy="0"/>
+        </a:xfrm>
+      </p:grpSpPr>
       <p:sp>
         <p:nvSpPr>
           <p:cNvPr id="2" name="Oval 1"/>
@@ -3151,6 +3152,7 @@
           <a:lstStyle/>
           <a:p>
             <a:pPr algn="ctr"/>
+            <a:endParaRPr/>
           </a:p>
         </p:txBody>
       </p:sp>
@@ -3194,6 +3196,7 @@
           <a:lstStyle/>
           <a:p>
             <a:pPr algn="ctr"/>
+            <a:endParaRPr/>
           </a:p>
         </p:txBody>
       </p:sp>
@@ -3237,6 +3240,7 @@
           <a:lstStyle/>
           <a:p>
             <a:pPr algn="ctr"/>
+            <a:endParaRPr/>
           </a:p>
         </p:txBody>
       </p:sp>
@@ -3357,7 +3361,7 @@
         <p:spPr>
           <a:xfrm>
             <a:off x="896112" y="5897880"/>
-            <a:ext cx="8046720" cy="274320"/>
+            <a:ext cx="8046720" cy="461665"/>
           </a:xfrm>
           <a:prstGeom prst="rect">
             <a:avLst/>
@@ -3379,21 +3383,37 @@
               </a:defRPr>
             </a:pPr>
             <a:r>
-              <a:t>Presentation created from the supplied Word document</a:t>
-            </a:r>
-          </a:p>
-        </p:txBody>
-      </p:sp>
-      <p:sp>
-        <p:nvSpPr>
-          <p:cNvPr id="9" name="TextBox 8"/>
+              <a:rPr lang="en-US" dirty="0"/>
+              <a:t>Presented By </a:t>
+            </a:r>
+          </a:p>
+          <a:p>
+            <a:pPr>
+              <a:defRPr sz="1200" b="0">
+                <a:solidFill>
+                  <a:srgbClr val="BED3F2"/>
+                </a:solidFill>
+                <a:latin typeface="Aptos"/>
+              </a:defRPr>
+            </a:pPr>
+            <a:r>
+              <a:rPr lang="en-US" dirty="0"/>
+              <a:t>J Shahid Aqeel</a:t>
+            </a:r>
+            <a:endParaRPr dirty="0"/>
+          </a:p>
+        </p:txBody>
+      </p:sp>
+      <p:sp>
+        <p:nvSpPr>
+          <p:cNvPr id="10" name="TextBox 9"/>
           <p:cNvSpPr txBox="1"/>
           <p:nvPr/>
         </p:nvSpPr>
         <p:spPr>
           <a:xfrm>
-            <a:off x="502920" y="6510528"/>
-            <a:ext cx="7772400" cy="164592"/>
+            <a:off x="11109960" y="6473952"/>
+            <a:ext cx="502920" cy="228600"/>
           </a:xfrm>
           <a:prstGeom prst="rect">
             <a:avLst/>
@@ -3401,43 +3421,7 @@
           <a:noFill/>
         </p:spPr>
         <p:txBody>
-          <a:bodyPr wrap="square" lIns="0" rIns="0" tIns="0" bIns="0">
-            <a:spAutoFit/>
-          </a:bodyPr>
-          <a:lstStyle/>
-          <a:p>
-            <a:pPr>
-              <a:defRPr sz="900" b="1">
-                <a:solidFill>
-                  <a:srgbClr val="CED8E7"/>
-                </a:solidFill>
-                <a:latin typeface="Aptos"/>
-              </a:defRPr>
-            </a:pPr>
-            <a:r>
-              <a:t>AI CHATBOT  •  SYSTEM OVERVIEW</a:t>
-            </a:r>
-          </a:p>
-        </p:txBody>
-      </p:sp>
-      <p:sp>
-        <p:nvSpPr>
-          <p:cNvPr id="10" name="TextBox 9"/>
-          <p:cNvSpPr txBox="1"/>
-          <p:nvPr/>
-        </p:nvSpPr>
-        <p:spPr>
-          <a:xfrm>
-            <a:off x="11109960" y="6473952"/>
-            <a:ext cx="502920" cy="228600"/>
-          </a:xfrm>
-          <a:prstGeom prst="rect">
-            <a:avLst/>
-          </a:prstGeom>
-          <a:noFill/>
-        </p:spPr>
-        <p:txBody>
-          <a:bodyPr wrap="square" lIns="0" rIns="0" tIns="0" bIns="0">
+          <a:bodyPr wrap="square" lIns="0" tIns="0" rIns="0" bIns="0">
             <a:spAutoFit/>
           </a:bodyPr>
           <a:lstStyle/>
@@ -3465,7 +3449,7 @@
 </file>
 
 <file path=ppt/slides/slide10.xml><?xml version="1.0" encoding="utf-8"?>
-<p:sld xmlns:a="http://schemas.openxmlformats.org/drawingml/2006/main" xmlns:p="http://schemas.openxmlformats.org/presentationml/2006/main" xmlns:r="http://schemas.openxmlformats.org/officeDocument/2006/relationships">
+<p:sld xmlns:a="http://schemas.openxmlformats.org/drawingml/2006/main" xmlns:r="http://schemas.openxmlformats.org/officeDocument/2006/relationships" xmlns:p="http://schemas.openxmlformats.org/presentationml/2006/main">
   <p:cSld>
     <p:bg>
       <p:bgPr>
@@ -3481,7 +3465,14 @@
         <p:cNvGrpSpPr/>
         <p:nvPr/>
       </p:nvGrpSpPr>
-      <p:grpSpPr/>
+      <p:grpSpPr>
+        <a:xfrm>
+          <a:off x="0" y="0"/>
+          <a:ext cx="0" cy="0"/>
+          <a:chOff x="0" y="0"/>
+          <a:chExt cx="0" cy="0"/>
+        </a:xfrm>
+      </p:grpSpPr>
       <p:sp>
         <p:nvSpPr>
           <p:cNvPr id="2" name="Rectangle 1"/>
@@ -3522,6 +3513,7 @@
           <a:lstStyle/>
           <a:p>
             <a:pPr algn="ctr"/>
+            <a:endParaRPr/>
           </a:p>
         </p:txBody>
       </p:sp>
@@ -3599,10 +3591,10 @@
           </a:fontRef>
         </p:style>
         <p:txBody>
-          <a:bodyPr rtlCol="0" anchor="ctr" wrap="square" lIns="347472" rIns="292608" tIns="274320" bIns="182880"/>
-          <a:lstStyle/>
-          <a:p>
-            <a:pPr algn="ctr">
+          <a:bodyPr wrap="square" lIns="347472" tIns="274320" rIns="292608" bIns="182880" rtlCol="0" anchor="ctr"/>
+          <a:lstStyle/>
+          <a:p>
+            <a:pPr algn="just">
               <a:spcAft>
                 <a:spcPts val="1800"/>
               </a:spcAft>
@@ -3614,11 +3606,12 @@
               </a:defRPr>
             </a:pPr>
             <a:r>
+              <a:rPr dirty="0"/>
               <a:t>•  The agent selects an appropriate tool based on the user prompt</a:t>
             </a:r>
           </a:p>
           <a:p>
-            <a:pPr>
+            <a:pPr algn="just">
               <a:spcAft>
                 <a:spcPts val="1800"/>
               </a:spcAft>
@@ -3630,11 +3623,12 @@
               </a:defRPr>
             </a:pPr>
             <a:r>
+              <a:rPr dirty="0"/>
               <a:t>•  Tools return structured JSON from the database or knowledge base</a:t>
             </a:r>
           </a:p>
           <a:p>
-            <a:pPr>
+            <a:pPr algn="just">
               <a:spcAft>
                 <a:spcPts val="1800"/>
               </a:spcAft>
@@ -3646,11 +3640,12 @@
               </a:defRPr>
             </a:pPr>
             <a:r>
+              <a:rPr dirty="0"/>
               <a:t>•  The agent synthesizes a grounded response from the retrieved information</a:t>
             </a:r>
           </a:p>
           <a:p>
-            <a:pPr>
+            <a:pPr algn="just">
               <a:spcAft>
                 <a:spcPts val="1800"/>
               </a:spcAft>
@@ -3662,6 +3657,7 @@
               </a:defRPr>
             </a:pPr>
             <a:r>
+              <a:rPr dirty="0"/>
               <a:t>•  This approach goes beyond answering from pre-trained memory alone</a:t>
             </a:r>
           </a:p>
@@ -3669,14 +3665,14 @@
       </p:sp>
       <p:sp>
         <p:nvSpPr>
-          <p:cNvPr id="5" name="TextBox 4"/>
+          <p:cNvPr id="6" name="TextBox 5"/>
           <p:cNvSpPr txBox="1"/>
           <p:nvPr/>
         </p:nvSpPr>
         <p:spPr>
           <a:xfrm>
-            <a:off x="502920" y="6510528"/>
-            <a:ext cx="7772400" cy="164592"/>
+            <a:off x="11109960" y="6473952"/>
+            <a:ext cx="502920" cy="228600"/>
           </a:xfrm>
           <a:prstGeom prst="rect">
             <a:avLst/>
@@ -3684,43 +3680,7 @@
           <a:noFill/>
         </p:spPr>
         <p:txBody>
-          <a:bodyPr wrap="square" lIns="0" rIns="0" tIns="0" bIns="0">
-            <a:spAutoFit/>
-          </a:bodyPr>
-          <a:lstStyle/>
-          <a:p>
-            <a:pPr>
-              <a:defRPr sz="900" b="1">
-                <a:solidFill>
-                  <a:srgbClr val="636F82"/>
-                </a:solidFill>
-                <a:latin typeface="Aptos"/>
-              </a:defRPr>
-            </a:pPr>
-            <a:r>
-              <a:t>AI CHATBOT  •  SYSTEM OVERVIEW</a:t>
-            </a:r>
-          </a:p>
-        </p:txBody>
-      </p:sp>
-      <p:sp>
-        <p:nvSpPr>
-          <p:cNvPr id="6" name="TextBox 5"/>
-          <p:cNvSpPr txBox="1"/>
-          <p:nvPr/>
-        </p:nvSpPr>
-        <p:spPr>
-          <a:xfrm>
-            <a:off x="11109960" y="6473952"/>
-            <a:ext cx="502920" cy="228600"/>
-          </a:xfrm>
-          <a:prstGeom prst="rect">
-            <a:avLst/>
-          </a:prstGeom>
-          <a:noFill/>
-        </p:spPr>
-        <p:txBody>
-          <a:bodyPr wrap="square" lIns="0" rIns="0" tIns="0" bIns="0">
+          <a:bodyPr wrap="square" lIns="0" tIns="0" rIns="0" bIns="0">
             <a:spAutoFit/>
           </a:bodyPr>
           <a:lstStyle/>
@@ -3748,7 +3708,7 @@
 </file>
 
 <file path=ppt/slides/slide11.xml><?xml version="1.0" encoding="utf-8"?>
-<p:sld xmlns:a="http://schemas.openxmlformats.org/drawingml/2006/main" xmlns:p="http://schemas.openxmlformats.org/presentationml/2006/main" xmlns:r="http://schemas.openxmlformats.org/officeDocument/2006/relationships">
+<p:sld xmlns:a="http://schemas.openxmlformats.org/drawingml/2006/main" xmlns:r="http://schemas.openxmlformats.org/officeDocument/2006/relationships" xmlns:p="http://schemas.openxmlformats.org/presentationml/2006/main">
   <p:cSld>
     <p:bg>
       <p:bgPr>
@@ -3764,7 +3724,14 @@
         <p:cNvGrpSpPr/>
         <p:nvPr/>
       </p:nvGrpSpPr>
-      <p:grpSpPr/>
+      <p:grpSpPr>
+        <a:xfrm>
+          <a:off x="0" y="0"/>
+          <a:ext cx="0" cy="0"/>
+          <a:chOff x="0" y="0"/>
+          <a:chExt cx="0" cy="0"/>
+        </a:xfrm>
+      </p:grpSpPr>
       <p:sp>
         <p:nvSpPr>
           <p:cNvPr id="2" name="Rectangle 1"/>
@@ -3805,6 +3772,7 @@
           <a:lstStyle/>
           <a:p>
             <a:pPr algn="ctr"/>
+            <a:endParaRPr/>
           </a:p>
         </p:txBody>
       </p:sp>
@@ -3882,10 +3850,10 @@
           </a:fontRef>
         </p:style>
         <p:txBody>
-          <a:bodyPr rtlCol="0" anchor="ctr" wrap="square" lIns="228600" rIns="201168" tIns="201168" bIns="137160"/>
-          <a:lstStyle/>
-          <a:p>
-            <a:pPr algn="ctr">
+          <a:bodyPr wrap="square" lIns="228600" tIns="201168" rIns="201168" bIns="137160" rtlCol="0" anchor="ctr"/>
+          <a:lstStyle/>
+          <a:p>
+            <a:pPr algn="just">
               <a:spcAft>
                 <a:spcPts val="1400"/>
               </a:spcAft>
@@ -3897,11 +3865,12 @@
               </a:defRPr>
             </a:pPr>
             <a:r>
+              <a:rPr dirty="0"/>
               <a:t>•  Retrieval-Augmented Generation (RAG) supports company-specific policies such as enrollment fees, legal rules, and surety requirements</a:t>
             </a:r>
           </a:p>
           <a:p>
-            <a:pPr>
+            <a:pPr algn="just">
               <a:spcAft>
                 <a:spcPts val="1400"/>
               </a:spcAft>
@@ -3913,11 +3882,12 @@
               </a:defRPr>
             </a:pPr>
             <a:r>
+              <a:rPr dirty="0"/>
               <a:t>•  Vector search matches query meaning against document embeddings</a:t>
             </a:r>
           </a:p>
           <a:p>
-            <a:pPr>
+            <a:pPr algn="just">
               <a:spcAft>
                 <a:spcPts val="1400"/>
               </a:spcAft>
@@ -3929,6 +3899,7 @@
               </a:defRPr>
             </a:pPr>
             <a:r>
+              <a:rPr dirty="0"/>
               <a:t>•  BM25 searches for exact keywords; hybrid scoring combines the signals</a:t>
             </a:r>
           </a:p>
@@ -3972,10 +3943,10 @@
           </a:fontRef>
         </p:style>
         <p:txBody>
-          <a:bodyPr rtlCol="0" anchor="ctr" wrap="square" lIns="228600" rIns="201168" tIns="201168" bIns="137160"/>
-          <a:lstStyle/>
-          <a:p>
-            <a:pPr algn="ctr">
+          <a:bodyPr wrap="square" lIns="228600" tIns="201168" rIns="201168" bIns="137160" rtlCol="0" anchor="ctr"/>
+          <a:lstStyle/>
+          <a:p>
+            <a:pPr algn="just">
               <a:spcAft>
                 <a:spcPts val="1400"/>
               </a:spcAft>
@@ -3987,11 +3958,12 @@
               </a:defRPr>
             </a:pPr>
             <a:r>
+              <a:rPr dirty="0"/>
               <a:t>•  Configured thresholds in the source: MIN_VECTOR_SIMILARITY = 0.62 and MIN_KEYWORD_SCORE = 1.2</a:t>
             </a:r>
           </a:p>
           <a:p>
-            <a:pPr>
+            <a:pPr algn="just">
               <a:spcAft>
                 <a:spcPts val="1400"/>
               </a:spcAft>
@@ -4003,11 +3975,12 @@
               </a:defRPr>
             </a:pPr>
             <a:r>
+              <a:rPr dirty="0"/>
               <a:t>•  Irrelevant questions are flagged rather than answered with unrelated chunks</a:t>
             </a:r>
           </a:p>
           <a:p>
-            <a:pPr>
+            <a:pPr algn="just">
               <a:spcAft>
                 <a:spcPts val="1400"/>
               </a:spcAft>
@@ -4019,6 +3992,7 @@
               </a:defRPr>
             </a:pPr>
             <a:r>
+              <a:rPr dirty="0"/>
               <a:t>•  Server-Sent Events (SSE) gradually streams the response instead of sending it all at once</a:t>
             </a:r>
           </a:p>
@@ -4026,14 +4000,14 @@
       </p:sp>
       <p:sp>
         <p:nvSpPr>
-          <p:cNvPr id="6" name="TextBox 5"/>
+          <p:cNvPr id="7" name="TextBox 6"/>
           <p:cNvSpPr txBox="1"/>
           <p:nvPr/>
         </p:nvSpPr>
         <p:spPr>
           <a:xfrm>
-            <a:off x="502920" y="6510528"/>
-            <a:ext cx="7772400" cy="164592"/>
+            <a:off x="11109960" y="6473952"/>
+            <a:ext cx="502920" cy="228600"/>
           </a:xfrm>
           <a:prstGeom prst="rect">
             <a:avLst/>
@@ -4041,43 +4015,7 @@
           <a:noFill/>
         </p:spPr>
         <p:txBody>
-          <a:bodyPr wrap="square" lIns="0" rIns="0" tIns="0" bIns="0">
-            <a:spAutoFit/>
-          </a:bodyPr>
-          <a:lstStyle/>
-          <a:p>
-            <a:pPr>
-              <a:defRPr sz="900" b="1">
-                <a:solidFill>
-                  <a:srgbClr val="636F82"/>
-                </a:solidFill>
-                <a:latin typeface="Aptos"/>
-              </a:defRPr>
-            </a:pPr>
-            <a:r>
-              <a:t>AI CHATBOT  •  SYSTEM OVERVIEW</a:t>
-            </a:r>
-          </a:p>
-        </p:txBody>
-      </p:sp>
-      <p:sp>
-        <p:nvSpPr>
-          <p:cNvPr id="7" name="TextBox 6"/>
-          <p:cNvSpPr txBox="1"/>
-          <p:nvPr/>
-        </p:nvSpPr>
-        <p:spPr>
-          <a:xfrm>
-            <a:off x="11109960" y="6473952"/>
-            <a:ext cx="502920" cy="228600"/>
-          </a:xfrm>
-          <a:prstGeom prst="rect">
-            <a:avLst/>
-          </a:prstGeom>
-          <a:noFill/>
-        </p:spPr>
-        <p:txBody>
-          <a:bodyPr wrap="square" lIns="0" rIns="0" tIns="0" bIns="0">
+          <a:bodyPr wrap="square" lIns="0" tIns="0" rIns="0" bIns="0">
             <a:spAutoFit/>
           </a:bodyPr>
           <a:lstStyle/>
@@ -4105,7 +4043,7 @@
 </file>
 
 <file path=ppt/slides/slide12.xml><?xml version="1.0" encoding="utf-8"?>
-<p:sld xmlns:a="http://schemas.openxmlformats.org/drawingml/2006/main" xmlns:p="http://schemas.openxmlformats.org/presentationml/2006/main" xmlns:r="http://schemas.openxmlformats.org/officeDocument/2006/relationships">
+<p:sld xmlns:a="http://schemas.openxmlformats.org/drawingml/2006/main" xmlns:r="http://schemas.openxmlformats.org/officeDocument/2006/relationships" xmlns:p="http://schemas.openxmlformats.org/presentationml/2006/main">
   <p:cSld>
     <p:bg>
       <p:bgPr>
@@ -4121,7 +4059,14 @@
         <p:cNvGrpSpPr/>
         <p:nvPr/>
       </p:nvGrpSpPr>
-      <p:grpSpPr/>
+      <p:grpSpPr>
+        <a:xfrm>
+          <a:off x="0" y="0"/>
+          <a:ext cx="0" cy="0"/>
+          <a:chOff x="0" y="0"/>
+          <a:chExt cx="0" cy="0"/>
+        </a:xfrm>
+      </p:grpSpPr>
       <p:sp>
         <p:nvSpPr>
           <p:cNvPr id="2" name="Rectangle 1"/>
@@ -4162,6 +4107,7 @@
           <a:lstStyle/>
           <a:p>
             <a:pPr algn="ctr"/>
+            <a:endParaRPr/>
           </a:p>
         </p:txBody>
       </p:sp>
@@ -4239,10 +4185,10 @@
           </a:fontRef>
         </p:style>
         <p:txBody>
-          <a:bodyPr rtlCol="0" anchor="ctr" wrap="square" lIns="347472" rIns="292608" tIns="274320" bIns="182880"/>
-          <a:lstStyle/>
-          <a:p>
-            <a:pPr algn="ctr">
+          <a:bodyPr wrap="square" lIns="347472" tIns="274320" rIns="292608" bIns="182880" rtlCol="0" anchor="ctr"/>
+          <a:lstStyle/>
+          <a:p>
+            <a:pPr algn="just">
               <a:spcAft>
                 <a:spcPts val="1200"/>
               </a:spcAft>
@@ -4254,11 +4200,12 @@
               </a:defRPr>
             </a:pPr>
             <a:r>
+              <a:rPr dirty="0"/>
               <a:t>•  Separation of concerns and scoped tool access</a:t>
             </a:r>
           </a:p>
           <a:p>
-            <a:pPr>
+            <a:pPr algn="just">
               <a:spcAft>
                 <a:spcPts val="1200"/>
               </a:spcAft>
@@ -4270,11 +4217,12 @@
               </a:defRPr>
             </a:pPr>
             <a:r>
+              <a:rPr dirty="0"/>
               <a:t>•  A finance-category question is restricted to the finance tool and cannot access private profile details</a:t>
             </a:r>
           </a:p>
           <a:p>
-            <a:pPr>
+            <a:pPr algn="just">
               <a:spcAft>
                 <a:spcPts val="1200"/>
               </a:spcAft>
@@ -4286,11 +4234,12 @@
               </a:defRPr>
             </a:pPr>
             <a:r>
+              <a:rPr dirty="0"/>
               <a:t>•  The source describes a dual-engine design: local/offline operation and dynamic AI-model switching</a:t>
             </a:r>
           </a:p>
           <a:p>
-            <a:pPr>
+            <a:pPr algn="just">
               <a:spcAft>
                 <a:spcPts val="1200"/>
               </a:spcAft>
@@ -4302,11 +4251,12 @@
               </a:defRPr>
             </a:pPr>
             <a:r>
+              <a:rPr dirty="0"/>
               <a:t>•  Rich polymorphic UI cards pair text with dynamic native UI components</a:t>
             </a:r>
           </a:p>
           <a:p>
-            <a:pPr>
+            <a:pPr algn="just">
               <a:spcAft>
                 <a:spcPts val="1200"/>
               </a:spcAft>
@@ -4318,6 +4268,7 @@
               </a:defRPr>
             </a:pPr>
             <a:r>
+              <a:rPr dirty="0"/>
               <a:t>•  Admins can upload files from mobile into the app’s knowledge base</a:t>
             </a:r>
           </a:p>
@@ -4325,14 +4276,14 @@
       </p:sp>
       <p:sp>
         <p:nvSpPr>
-          <p:cNvPr id="5" name="TextBox 4"/>
+          <p:cNvPr id="6" name="TextBox 5"/>
           <p:cNvSpPr txBox="1"/>
           <p:nvPr/>
         </p:nvSpPr>
         <p:spPr>
           <a:xfrm>
-            <a:off x="502920" y="6510528"/>
-            <a:ext cx="7772400" cy="164592"/>
+            <a:off x="11109960" y="6473952"/>
+            <a:ext cx="502920" cy="228600"/>
           </a:xfrm>
           <a:prstGeom prst="rect">
             <a:avLst/>
@@ -4340,43 +4291,7 @@
           <a:noFill/>
         </p:spPr>
         <p:txBody>
-          <a:bodyPr wrap="square" lIns="0" rIns="0" tIns="0" bIns="0">
-            <a:spAutoFit/>
-          </a:bodyPr>
-          <a:lstStyle/>
-          <a:p>
-            <a:pPr>
-              <a:defRPr sz="900" b="1">
-                <a:solidFill>
-                  <a:srgbClr val="636F82"/>
-                </a:solidFill>
-                <a:latin typeface="Aptos"/>
-              </a:defRPr>
-            </a:pPr>
-            <a:r>
-              <a:t>AI CHATBOT  •  SYSTEM OVERVIEW</a:t>
-            </a:r>
-          </a:p>
-        </p:txBody>
-      </p:sp>
-      <p:sp>
-        <p:nvSpPr>
-          <p:cNvPr id="6" name="TextBox 5"/>
-          <p:cNvSpPr txBox="1"/>
-          <p:nvPr/>
-        </p:nvSpPr>
-        <p:spPr>
-          <a:xfrm>
-            <a:off x="11109960" y="6473952"/>
-            <a:ext cx="502920" cy="228600"/>
-          </a:xfrm>
-          <a:prstGeom prst="rect">
-            <a:avLst/>
-          </a:prstGeom>
-          <a:noFill/>
-        </p:spPr>
-        <p:txBody>
-          <a:bodyPr wrap="square" lIns="0" rIns="0" tIns="0" bIns="0">
+          <a:bodyPr wrap="square" lIns="0" tIns="0" rIns="0" bIns="0">
             <a:spAutoFit/>
           </a:bodyPr>
           <a:lstStyle/>
@@ -4404,7 +4319,7 @@
 </file>
 
 <file path=ppt/slides/slide13.xml><?xml version="1.0" encoding="utf-8"?>
-<p:sld xmlns:a="http://schemas.openxmlformats.org/drawingml/2006/main" xmlns:p="http://schemas.openxmlformats.org/presentationml/2006/main" xmlns:r="http://schemas.openxmlformats.org/officeDocument/2006/relationships">
+<p:sld xmlns:a="http://schemas.openxmlformats.org/drawingml/2006/main" xmlns:r="http://schemas.openxmlformats.org/officeDocument/2006/relationships" xmlns:p="http://schemas.openxmlformats.org/presentationml/2006/main">
   <p:cSld>
     <p:bg>
       <p:bgPr>
@@ -4420,7 +4335,14 @@
         <p:cNvGrpSpPr/>
         <p:nvPr/>
       </p:nvGrpSpPr>
-      <p:grpSpPr/>
+      <p:grpSpPr>
+        <a:xfrm>
+          <a:off x="0" y="0"/>
+          <a:ext cx="0" cy="0"/>
+          <a:chOff x="0" y="0"/>
+          <a:chExt cx="0" cy="0"/>
+        </a:xfrm>
+      </p:grpSpPr>
       <p:sp>
         <p:nvSpPr>
           <p:cNvPr id="2" name="Rectangle 1"/>
@@ -4461,6 +4383,7 @@
           <a:lstStyle/>
           <a:p>
             <a:pPr algn="ctr"/>
+            <a:endParaRPr/>
           </a:p>
         </p:txBody>
       </p:sp>
@@ -4538,10 +4461,10 @@
           </a:fontRef>
         </p:style>
         <p:txBody>
-          <a:bodyPr rtlCol="0" anchor="ctr" wrap="square" lIns="347472" rIns="292608" tIns="274320" bIns="182880"/>
-          <a:lstStyle/>
-          <a:p>
-            <a:pPr algn="ctr">
+          <a:bodyPr wrap="square" lIns="347472" tIns="274320" rIns="292608" bIns="182880" rtlCol="0" anchor="ctr"/>
+          <a:lstStyle/>
+          <a:p>
+            <a:pPr algn="just">
               <a:spcAft>
                 <a:spcPts val="1200"/>
               </a:spcAft>
@@ -4553,11 +4476,12 @@
               </a:defRPr>
             </a:pPr>
             <a:r>
+              <a:rPr dirty="0"/>
               <a:t>•  Turn tracing measures TTFT, total latency, prompt tokens, completion tokens, and tool execution times</a:t>
             </a:r>
           </a:p>
           <a:p>
-            <a:pPr>
+            <a:pPr algn="just">
               <a:spcAft>
                 <a:spcPts val="1200"/>
               </a:spcAft>
@@ -4569,11 +4493,12 @@
               </a:defRPr>
             </a:pPr>
             <a:r>
+              <a:rPr dirty="0"/>
               <a:t>•  Append-only JSONL logging records system performance</a:t>
             </a:r>
           </a:p>
           <a:p>
-            <a:pPr>
+            <a:pPr algn="just">
               <a:spcAft>
                 <a:spcPts val="1200"/>
               </a:spcAft>
@@ -4585,11 +4510,12 @@
               </a:defRPr>
             </a:pPr>
             <a:r>
+              <a:rPr dirty="0"/>
               <a:t>•  Live telemetry supports system behavior monitoring</a:t>
             </a:r>
           </a:p>
           <a:p>
-            <a:pPr>
+            <a:pPr algn="just">
               <a:spcAft>
                 <a:spcPts val="1200"/>
               </a:spcAft>
@@ -4601,11 +4527,12 @@
               </a:defRPr>
             </a:pPr>
             <a:r>
+              <a:rPr dirty="0"/>
               <a:t>•  Thumbs-up / thumbs-down ratings capture human feedback</a:t>
             </a:r>
           </a:p>
           <a:p>
-            <a:pPr>
+            <a:pPr algn="just">
               <a:spcAft>
                 <a:spcPts val="1200"/>
               </a:spcAft>
@@ -4617,6 +4544,7 @@
               </a:defRPr>
             </a:pPr>
             <a:r>
+              <a:rPr dirty="0"/>
               <a:t>•  Feedback is saved and support tickets are created for the support team</a:t>
             </a:r>
           </a:p>
@@ -4624,14 +4552,14 @@
       </p:sp>
       <p:sp>
         <p:nvSpPr>
-          <p:cNvPr id="5" name="TextBox 4"/>
+          <p:cNvPr id="6" name="TextBox 5"/>
           <p:cNvSpPr txBox="1"/>
           <p:nvPr/>
         </p:nvSpPr>
         <p:spPr>
           <a:xfrm>
-            <a:off x="502920" y="6510528"/>
-            <a:ext cx="7772400" cy="164592"/>
+            <a:off x="11109960" y="6473952"/>
+            <a:ext cx="502920" cy="228600"/>
           </a:xfrm>
           <a:prstGeom prst="rect">
             <a:avLst/>
@@ -4639,43 +4567,7 @@
           <a:noFill/>
         </p:spPr>
         <p:txBody>
-          <a:bodyPr wrap="square" lIns="0" rIns="0" tIns="0" bIns="0">
-            <a:spAutoFit/>
-          </a:bodyPr>
-          <a:lstStyle/>
-          <a:p>
-            <a:pPr>
-              <a:defRPr sz="900" b="1">
-                <a:solidFill>
-                  <a:srgbClr val="636F82"/>
-                </a:solidFill>
-                <a:latin typeface="Aptos"/>
-              </a:defRPr>
-            </a:pPr>
-            <a:r>
-              <a:t>AI CHATBOT  •  SYSTEM OVERVIEW</a:t>
-            </a:r>
-          </a:p>
-        </p:txBody>
-      </p:sp>
-      <p:sp>
-        <p:nvSpPr>
-          <p:cNvPr id="6" name="TextBox 5"/>
-          <p:cNvSpPr txBox="1"/>
-          <p:nvPr/>
-        </p:nvSpPr>
-        <p:spPr>
-          <a:xfrm>
-            <a:off x="11109960" y="6473952"/>
-            <a:ext cx="502920" cy="228600"/>
-          </a:xfrm>
-          <a:prstGeom prst="rect">
-            <a:avLst/>
-          </a:prstGeom>
-          <a:noFill/>
-        </p:spPr>
-        <p:txBody>
-          <a:bodyPr wrap="square" lIns="0" rIns="0" tIns="0" bIns="0">
+          <a:bodyPr wrap="square" lIns="0" tIns="0" rIns="0" bIns="0">
             <a:spAutoFit/>
           </a:bodyPr>
           <a:lstStyle/>
@@ -4703,7 +4595,7 @@
 </file>
 
 <file path=ppt/slides/slide14.xml><?xml version="1.0" encoding="utf-8"?>
-<p:sld xmlns:a="http://schemas.openxmlformats.org/drawingml/2006/main" xmlns:p="http://schemas.openxmlformats.org/presentationml/2006/main" xmlns:r="http://schemas.openxmlformats.org/officeDocument/2006/relationships">
+<p:sld xmlns:a="http://schemas.openxmlformats.org/drawingml/2006/main" xmlns:r="http://schemas.openxmlformats.org/officeDocument/2006/relationships" xmlns:p="http://schemas.openxmlformats.org/presentationml/2006/main">
   <p:cSld>
     <p:bg>
       <p:bgPr>
@@ -4719,7 +4611,14 @@
         <p:cNvGrpSpPr/>
         <p:nvPr/>
       </p:nvGrpSpPr>
-      <p:grpSpPr/>
+      <p:grpSpPr>
+        <a:xfrm>
+          <a:off x="0" y="0"/>
+          <a:ext cx="0" cy="0"/>
+          <a:chOff x="0" y="0"/>
+          <a:chExt cx="0" cy="0"/>
+        </a:xfrm>
+      </p:grpSpPr>
       <p:sp>
         <p:nvSpPr>
           <p:cNvPr id="2" name="Rectangle 1"/>
@@ -4760,6 +4659,7 @@
           <a:lstStyle/>
           <a:p>
             <a:pPr algn="ctr"/>
+            <a:endParaRPr/>
           </a:p>
         </p:txBody>
       </p:sp>
@@ -4837,10 +4737,10 @@
           </a:fontRef>
         </p:style>
         <p:txBody>
-          <a:bodyPr rtlCol="0" anchor="ctr" wrap="square" lIns="347472" rIns="292608" tIns="274320" bIns="182880"/>
-          <a:lstStyle/>
-          <a:p>
-            <a:pPr algn="ctr">
+          <a:bodyPr wrap="square" lIns="347472" tIns="274320" rIns="292608" bIns="182880" rtlCol="0" anchor="ctr"/>
+          <a:lstStyle/>
+          <a:p>
+            <a:pPr algn="just">
               <a:spcAft>
                 <a:spcPts val="1800"/>
               </a:spcAft>
@@ -4852,11 +4752,12 @@
               </a:defRPr>
             </a:pPr>
             <a:r>
+              <a:rPr dirty="0"/>
               <a:t>•  Chatbot_Requirements.txt defines functional requirements and business logic</a:t>
             </a:r>
           </a:p>
           <a:p>
-            <a:pPr>
+            <a:pPr algn="just">
               <a:spcAft>
                 <a:spcPts val="1800"/>
               </a:spcAft>
@@ -4868,11 +4769,12 @@
               </a:defRPr>
             </a:pPr>
             <a:r>
+              <a:rPr dirty="0"/>
               <a:t>•  DESIGN.md contains design information such as colors, fonts, and UI standards</a:t>
             </a:r>
           </a:p>
           <a:p>
-            <a:pPr>
+            <a:pPr algn="just">
               <a:spcAft>
                 <a:spcPts val="1800"/>
               </a:spcAft>
@@ -4884,6 +4786,7 @@
               </a:defRPr>
             </a:pPr>
             <a:r>
+              <a:rPr dirty="0"/>
               <a:t>•  HTML mockups screen_1 through screen_9 demonstrate prototype screens and system flow</a:t>
             </a:r>
           </a:p>
@@ -4891,14 +4794,14 @@
       </p:sp>
       <p:sp>
         <p:nvSpPr>
-          <p:cNvPr id="5" name="TextBox 4"/>
+          <p:cNvPr id="6" name="TextBox 5"/>
           <p:cNvSpPr txBox="1"/>
           <p:nvPr/>
         </p:nvSpPr>
         <p:spPr>
           <a:xfrm>
-            <a:off x="502920" y="6510528"/>
-            <a:ext cx="7772400" cy="164592"/>
+            <a:off x="11109960" y="6473952"/>
+            <a:ext cx="502920" cy="228600"/>
           </a:xfrm>
           <a:prstGeom prst="rect">
             <a:avLst/>
@@ -4906,43 +4809,7 @@
           <a:noFill/>
         </p:spPr>
         <p:txBody>
-          <a:bodyPr wrap="square" lIns="0" rIns="0" tIns="0" bIns="0">
-            <a:spAutoFit/>
-          </a:bodyPr>
-          <a:lstStyle/>
-          <a:p>
-            <a:pPr>
-              <a:defRPr sz="900" b="1">
-                <a:solidFill>
-                  <a:srgbClr val="636F82"/>
-                </a:solidFill>
-                <a:latin typeface="Aptos"/>
-              </a:defRPr>
-            </a:pPr>
-            <a:r>
-              <a:t>AI CHATBOT  •  SYSTEM OVERVIEW</a:t>
-            </a:r>
-          </a:p>
-        </p:txBody>
-      </p:sp>
-      <p:sp>
-        <p:nvSpPr>
-          <p:cNvPr id="6" name="TextBox 5"/>
-          <p:cNvSpPr txBox="1"/>
-          <p:nvPr/>
-        </p:nvSpPr>
-        <p:spPr>
-          <a:xfrm>
-            <a:off x="11109960" y="6473952"/>
-            <a:ext cx="502920" cy="228600"/>
-          </a:xfrm>
-          <a:prstGeom prst="rect">
-            <a:avLst/>
-          </a:prstGeom>
-          <a:noFill/>
-        </p:spPr>
-        <p:txBody>
-          <a:bodyPr wrap="square" lIns="0" rIns="0" tIns="0" bIns="0">
+          <a:bodyPr wrap="square" lIns="0" tIns="0" rIns="0" bIns="0">
             <a:spAutoFit/>
           </a:bodyPr>
           <a:lstStyle/>
@@ -4970,7 +4837,112 @@
 </file>
 
 <file path=ppt/slides/slide15.xml><?xml version="1.0" encoding="utf-8"?>
-<p:sld xmlns:a="http://schemas.openxmlformats.org/drawingml/2006/main" xmlns:p="http://schemas.openxmlformats.org/presentationml/2006/main" xmlns:r="http://schemas.openxmlformats.org/officeDocument/2006/relationships">
+<p:sld xmlns:a="http://schemas.openxmlformats.org/drawingml/2006/main" xmlns:r="http://schemas.openxmlformats.org/officeDocument/2006/relationships" xmlns:p="http://schemas.openxmlformats.org/presentationml/2006/main">
+  <p:cSld>
+    <p:bg>
+      <p:bgPr>
+        <a:solidFill>
+          <a:srgbClr val="142242"/>
+        </a:solidFill>
+        <a:effectLst/>
+      </p:bgPr>
+    </p:bg>
+    <p:spTree>
+      <p:nvGrpSpPr>
+        <p:cNvPr id="1" name=""/>
+        <p:cNvGrpSpPr/>
+        <p:nvPr/>
+      </p:nvGrpSpPr>
+      <p:grpSpPr>
+        <a:xfrm>
+          <a:off x="0" y="0"/>
+          <a:ext cx="0" cy="0"/>
+          <a:chOff x="0" y="0"/>
+          <a:chExt cx="0" cy="0"/>
+        </a:xfrm>
+      </p:grpSpPr>
+      <p:sp>
+        <p:nvSpPr>
+          <p:cNvPr id="2" name="TextBox 1"/>
+          <p:cNvSpPr txBox="1"/>
+          <p:nvPr/>
+        </p:nvSpPr>
+        <p:spPr>
+          <a:xfrm>
+            <a:off x="822960" y="2103120"/>
+            <a:ext cx="6400800" cy="822960"/>
+          </a:xfrm>
+          <a:prstGeom prst="rect">
+            <a:avLst/>
+          </a:prstGeom>
+          <a:noFill/>
+        </p:spPr>
+        <p:txBody>
+          <a:bodyPr wrap="square" lIns="45720" rIns="45720">
+            <a:spAutoFit/>
+          </a:bodyPr>
+          <a:lstStyle/>
+          <a:p>
+            <a:pPr>
+              <a:defRPr sz="4200" b="1">
+                <a:solidFill>
+                  <a:srgbClr val="FFFFFF"/>
+                </a:solidFill>
+                <a:latin typeface="Aptos"/>
+              </a:defRPr>
+            </a:pPr>
+            <a:r>
+              <a:t>Thank You</a:t>
+            </a:r>
+          </a:p>
+        </p:txBody>
+      </p:sp>
+      <p:sp>
+        <p:nvSpPr>
+          <p:cNvPr id="6" name="TextBox 5"/>
+          <p:cNvSpPr txBox="1"/>
+          <p:nvPr/>
+        </p:nvSpPr>
+        <p:spPr>
+          <a:xfrm>
+            <a:off x="11109960" y="6473952"/>
+            <a:ext cx="502920" cy="228600"/>
+          </a:xfrm>
+          <a:prstGeom prst="rect">
+            <a:avLst/>
+          </a:prstGeom>
+          <a:noFill/>
+        </p:spPr>
+        <p:txBody>
+          <a:bodyPr wrap="square" lIns="0" tIns="0" rIns="0" bIns="0">
+            <a:spAutoFit/>
+          </a:bodyPr>
+          <a:lstStyle/>
+          <a:p>
+            <a:pPr algn="r">
+              <a:defRPr sz="1000" b="1">
+                <a:solidFill>
+                  <a:srgbClr val="CED8E7"/>
+                </a:solidFill>
+                <a:latin typeface="Aptos"/>
+              </a:defRPr>
+            </a:pPr>
+            <a:r>
+              <a:t>16</a:t>
+            </a:r>
+          </a:p>
+        </p:txBody>
+      </p:sp>
+    </p:spTree>
+  </p:cSld>
+  <p:clrMapOvr>
+    <a:masterClrMapping/>
+  </p:clrMapOvr>
+</p:sld>
+</file>
+
+<file path=ppt/slides/slide2.xml><?xml version="1.0" encoding="utf-8"?>
+<p:sld xmlns:a="http://schemas.openxmlformats.org/drawingml/2006/main" xmlns:r="http://schemas.openxmlformats.org/officeDocument/2006/relationships" xmlns:p="http://schemas.openxmlformats.org/presentationml/2006/main">
   <p:cSld>
     <p:bg>
       <p:bgPr>
@@ -4986,7 +4958,14 @@
         <p:cNvGrpSpPr/>
         <p:nvPr/>
       </p:nvGrpSpPr>
-      <p:grpSpPr/>
+      <p:grpSpPr>
+        <a:xfrm>
+          <a:off x="0" y="0"/>
+          <a:ext cx="0" cy="0"/>
+          <a:chOff x="0" y="0"/>
+          <a:chExt cx="0" cy="0"/>
+        </a:xfrm>
+      </p:grpSpPr>
       <p:sp>
         <p:nvSpPr>
           <p:cNvPr id="2" name="Rectangle 1"/>
@@ -5002,7 +4981,7 @@
             <a:avLst/>
           </a:prstGeom>
           <a:solidFill>
-            <a:srgbClr val="2F69BE"/>
+            <a:srgbClr val="1DA1A0"/>
           </a:solidFill>
           <a:ln>
             <a:noFill/>
@@ -5027,6 +5006,7 @@
           <a:lstStyle/>
           <a:p>
             <a:pPr algn="ctr"/>
+            <a:endParaRPr/>
           </a:p>
         </p:txBody>
       </p:sp>
@@ -5061,7 +5041,7 @@
               </a:defRPr>
             </a:pPr>
             <a:r>
-              <a:t>Summary</a:t>
+              <a:t>High-Level Architecture</a:t>
             </a:r>
           </a:p>
         </p:txBody>
@@ -5074,8 +5054,8 @@
         </p:nvSpPr>
         <p:spPr>
           <a:xfrm>
-            <a:off x="685800" y="1371600"/>
-            <a:ext cx="10835640" cy="4892040"/>
+            <a:off x="640080" y="1417320"/>
+            <a:ext cx="3429000" cy="1417320"/>
           </a:xfrm>
           <a:prstGeom prst="roundRect">
             <a:avLst/>
@@ -5085,7 +5065,7 @@
           </a:solidFill>
           <a:ln>
             <a:solidFill>
-              <a:srgbClr val="DEE5EF"/>
+              <a:srgbClr val="D5DFEC"/>
             </a:solidFill>
           </a:ln>
         </p:spPr>
@@ -5104,87 +5084,11 @@
           </a:fontRef>
         </p:style>
         <p:txBody>
-          <a:bodyPr rtlCol="0" anchor="ctr" wrap="square" lIns="347472" rIns="292608" tIns="274320" bIns="182880"/>
-          <a:lstStyle/>
-          <a:p>
-            <a:pPr algn="ctr">
-              <a:spcAft>
-                <a:spcPts val="1200"/>
-              </a:spcAft>
-              <a:defRPr sz="1600">
-                <a:solidFill>
-                  <a:srgbClr val="2A3342"/>
-                </a:solidFill>
-                <a:latin typeface="Aptos"/>
-              </a:defRPr>
-            </a:pPr>
-            <a:r>
-              <a:t>•  Modular Python backend with scoped tools</a:t>
-            </a:r>
-          </a:p>
-          <a:p>
-            <a:pPr>
-              <a:spcAft>
-                <a:spcPts val="1200"/>
-              </a:spcAft>
-              <a:defRPr sz="1600">
-                <a:solidFill>
-                  <a:srgbClr val="2A3342"/>
-                </a:solidFill>
-                <a:latin typeface="Aptos"/>
-              </a:defRPr>
-            </a:pPr>
-            <a:r>
-              <a:t>•  Hybrid RAG combines vector and keyword retrieval to ground answers</a:t>
-            </a:r>
-          </a:p>
-          <a:p>
-            <a:pPr>
-              <a:spcAft>
-                <a:spcPts val="1200"/>
-              </a:spcAft>
-              <a:defRPr sz="1600">
-                <a:solidFill>
-                  <a:srgbClr val="2A3342"/>
-                </a:solidFill>
-                <a:latin typeface="Aptos"/>
-              </a:defRPr>
-            </a:pPr>
-            <a:r>
-              <a:t>•  Mobile app supports chat, model settings, knowledge management, and structured answer cards</a:t>
-            </a:r>
-          </a:p>
-          <a:p>
-            <a:pPr>
-              <a:spcAft>
-                <a:spcPts val="1200"/>
-              </a:spcAft>
-              <a:defRPr sz="1600">
-                <a:solidFill>
-                  <a:srgbClr val="2A3342"/>
-                </a:solidFill>
-                <a:latin typeface="Aptos"/>
-              </a:defRPr>
-            </a:pPr>
-            <a:r>
-              <a:t>•  Telemetry and human feedback enable monitoring and support workflows</a:t>
-            </a:r>
-          </a:p>
-          <a:p>
-            <a:pPr>
-              <a:spcAft>
-                <a:spcPts val="1200"/>
-              </a:spcAft>
-              <a:defRPr sz="1600">
-                <a:solidFill>
-                  <a:srgbClr val="2A3342"/>
-                </a:solidFill>
-                <a:latin typeface="Aptos"/>
-              </a:defRPr>
-            </a:pPr>
-            <a:r>
-              <a:t>•  Chit fund features include auctions, e-signatures, passbook history, installments, and dividends</a:t>
-            </a:r>
+          <a:bodyPr rtlCol="0" anchor="ctr"/>
+          <a:lstStyle/>
+          <a:p>
+            <a:pPr algn="ctr"/>
+            <a:endParaRPr/>
           </a:p>
         </p:txBody>
       </p:sp>
@@ -5196,8 +5100,8 @@
         </p:nvSpPr>
         <p:spPr>
           <a:xfrm>
-            <a:off x="502920" y="6510528"/>
-            <a:ext cx="7772400" cy="164592"/>
+            <a:off x="804671" y="1600200"/>
+            <a:ext cx="3108960" cy="320040"/>
           </a:xfrm>
           <a:prstGeom prst="rect">
             <a:avLst/>
@@ -5205,21 +5109,21 @@
           <a:noFill/>
         </p:spPr>
         <p:txBody>
-          <a:bodyPr wrap="square" lIns="0" rIns="0" tIns="0" bIns="0">
+          <a:bodyPr wrap="square" lIns="45720" rIns="45720">
             <a:spAutoFit/>
           </a:bodyPr>
           <a:lstStyle/>
           <a:p>
             <a:pPr>
-              <a:defRPr sz="900" b="1">
-                <a:solidFill>
-                  <a:srgbClr val="636F82"/>
-                </a:solidFill>
-                <a:latin typeface="Aptos"/>
-              </a:defRPr>
-            </a:pPr>
-            <a:r>
-              <a:t>AI CHATBOT  •  SYSTEM OVERVIEW</a:t>
+              <a:defRPr sz="1600" b="1">
+                <a:solidFill>
+                  <a:srgbClr val="2F69BE"/>
+                </a:solidFill>
+                <a:latin typeface="Aptos"/>
+              </a:defRPr>
+            </a:pPr>
+            <a:r>
+              <a:t>1  Mobile App</a:t>
             </a:r>
           </a:p>
         </p:txBody>
@@ -5232,8 +5136,8 @@
         </p:nvSpPr>
         <p:spPr>
           <a:xfrm>
-            <a:off x="11109960" y="6473952"/>
-            <a:ext cx="502920" cy="228600"/>
+            <a:off x="804671" y="2011680"/>
+            <a:ext cx="3063240" cy="594360"/>
           </a:xfrm>
           <a:prstGeom prst="rect">
             <a:avLst/>
@@ -5241,11 +5145,637 @@
           <a:noFill/>
         </p:spPr>
         <p:txBody>
-          <a:bodyPr wrap="square" lIns="0" rIns="0" tIns="0" bIns="0">
+          <a:bodyPr wrap="square" lIns="45720" rIns="45720">
             <a:spAutoFit/>
           </a:bodyPr>
           <a:lstStyle/>
           <a:p>
+            <a:pPr>
+              <a:defRPr sz="1300" b="0">
+                <a:solidFill>
+                  <a:srgbClr val="2A3342"/>
+                </a:solidFill>
+                <a:latin typeface="Aptos"/>
+              </a:defRPr>
+            </a:pPr>
+            <a:r>
+              <a:t>Chat screen, settings, knowledge admin, answer cards</a:t>
+            </a:r>
+          </a:p>
+        </p:txBody>
+      </p:sp>
+      <p:sp>
+        <p:nvSpPr>
+          <p:cNvPr id="7" name="Rounded Rectangle 6"/>
+          <p:cNvSpPr/>
+          <p:nvPr/>
+        </p:nvSpPr>
+        <p:spPr>
+          <a:xfrm>
+            <a:off x="4480560" y="1417320"/>
+            <a:ext cx="3429000" cy="1417320"/>
+          </a:xfrm>
+          <a:prstGeom prst="roundRect">
+            <a:avLst/>
+          </a:prstGeom>
+          <a:solidFill>
+            <a:srgbClr val="FFFFFF"/>
+          </a:solidFill>
+          <a:ln>
+            <a:solidFill>
+              <a:srgbClr val="D5DFEC"/>
+            </a:solidFill>
+          </a:ln>
+        </p:spPr>
+        <p:style>
+          <a:lnRef idx="1">
+            <a:schemeClr val="accent1"/>
+          </a:lnRef>
+          <a:fillRef idx="3">
+            <a:schemeClr val="accent1"/>
+          </a:fillRef>
+          <a:effectRef idx="2">
+            <a:schemeClr val="accent1"/>
+          </a:effectRef>
+          <a:fontRef idx="minor">
+            <a:schemeClr val="lt1"/>
+          </a:fontRef>
+        </p:style>
+        <p:txBody>
+          <a:bodyPr rtlCol="0" anchor="ctr"/>
+          <a:lstStyle/>
+          <a:p>
+            <a:pPr algn="ctr"/>
+            <a:endParaRPr/>
+          </a:p>
+        </p:txBody>
+      </p:sp>
+      <p:sp>
+        <p:nvSpPr>
+          <p:cNvPr id="8" name="TextBox 7"/>
+          <p:cNvSpPr txBox="1"/>
+          <p:nvPr/>
+        </p:nvSpPr>
+        <p:spPr>
+          <a:xfrm>
+            <a:off x="4645152" y="1600200"/>
+            <a:ext cx="3108960" cy="320040"/>
+          </a:xfrm>
+          <a:prstGeom prst="rect">
+            <a:avLst/>
+          </a:prstGeom>
+          <a:noFill/>
+        </p:spPr>
+        <p:txBody>
+          <a:bodyPr wrap="square" lIns="45720" rIns="45720">
+            <a:spAutoFit/>
+          </a:bodyPr>
+          <a:lstStyle/>
+          <a:p>
+            <a:pPr>
+              <a:defRPr sz="1600" b="1">
+                <a:solidFill>
+                  <a:srgbClr val="2F69BE"/>
+                </a:solidFill>
+                <a:latin typeface="Aptos"/>
+              </a:defRPr>
+            </a:pPr>
+            <a:r>
+              <a:t>2  Flask API</a:t>
+            </a:r>
+          </a:p>
+        </p:txBody>
+      </p:sp>
+      <p:sp>
+        <p:nvSpPr>
+          <p:cNvPr id="9" name="TextBox 8"/>
+          <p:cNvSpPr txBox="1"/>
+          <p:nvPr/>
+        </p:nvSpPr>
+        <p:spPr>
+          <a:xfrm>
+            <a:off x="4645152" y="2011680"/>
+            <a:ext cx="3063240" cy="594360"/>
+          </a:xfrm>
+          <a:prstGeom prst="rect">
+            <a:avLst/>
+          </a:prstGeom>
+          <a:noFill/>
+        </p:spPr>
+        <p:txBody>
+          <a:bodyPr wrap="square" lIns="45720" rIns="45720">
+            <a:spAutoFit/>
+          </a:bodyPr>
+          <a:lstStyle/>
+          <a:p>
+            <a:pPr>
+              <a:defRPr sz="1300" b="0">
+                <a:solidFill>
+                  <a:srgbClr val="2A3342"/>
+                </a:solidFill>
+                <a:latin typeface="Aptos"/>
+              </a:defRPr>
+            </a:pPr>
+            <a:r>
+              <a:t>Receives requests and returns responses</a:t>
+            </a:r>
+          </a:p>
+        </p:txBody>
+      </p:sp>
+      <p:sp>
+        <p:nvSpPr>
+          <p:cNvPr id="10" name="Rounded Rectangle 9"/>
+          <p:cNvSpPr/>
+          <p:nvPr/>
+        </p:nvSpPr>
+        <p:spPr>
+          <a:xfrm>
+            <a:off x="8321040" y="1417320"/>
+            <a:ext cx="3429000" cy="1417320"/>
+          </a:xfrm>
+          <a:prstGeom prst="roundRect">
+            <a:avLst/>
+          </a:prstGeom>
+          <a:solidFill>
+            <a:srgbClr val="FFFFFF"/>
+          </a:solidFill>
+          <a:ln>
+            <a:solidFill>
+              <a:srgbClr val="D5DFEC"/>
+            </a:solidFill>
+          </a:ln>
+        </p:spPr>
+        <p:style>
+          <a:lnRef idx="1">
+            <a:schemeClr val="accent1"/>
+          </a:lnRef>
+          <a:fillRef idx="3">
+            <a:schemeClr val="accent1"/>
+          </a:fillRef>
+          <a:effectRef idx="2">
+            <a:schemeClr val="accent1"/>
+          </a:effectRef>
+          <a:fontRef idx="minor">
+            <a:schemeClr val="lt1"/>
+          </a:fontRef>
+        </p:style>
+        <p:txBody>
+          <a:bodyPr rtlCol="0" anchor="ctr"/>
+          <a:lstStyle/>
+          <a:p>
+            <a:pPr algn="ctr"/>
+            <a:endParaRPr/>
+          </a:p>
+        </p:txBody>
+      </p:sp>
+      <p:sp>
+        <p:nvSpPr>
+          <p:cNvPr id="11" name="TextBox 10"/>
+          <p:cNvSpPr txBox="1"/>
+          <p:nvPr/>
+        </p:nvSpPr>
+        <p:spPr>
+          <a:xfrm>
+            <a:off x="8485632" y="1600200"/>
+            <a:ext cx="3108960" cy="320040"/>
+          </a:xfrm>
+          <a:prstGeom prst="rect">
+            <a:avLst/>
+          </a:prstGeom>
+          <a:noFill/>
+        </p:spPr>
+        <p:txBody>
+          <a:bodyPr wrap="square" lIns="45720" rIns="45720">
+            <a:spAutoFit/>
+          </a:bodyPr>
+          <a:lstStyle/>
+          <a:p>
+            <a:pPr>
+              <a:defRPr sz="1600" b="1">
+                <a:solidFill>
+                  <a:srgbClr val="2F69BE"/>
+                </a:solidFill>
+                <a:latin typeface="Aptos"/>
+              </a:defRPr>
+            </a:pPr>
+            <a:r>
+              <a:t>3  Agent + Router</a:t>
+            </a:r>
+          </a:p>
+        </p:txBody>
+      </p:sp>
+      <p:sp>
+        <p:nvSpPr>
+          <p:cNvPr id="12" name="TextBox 11"/>
+          <p:cNvSpPr txBox="1"/>
+          <p:nvPr/>
+        </p:nvSpPr>
+        <p:spPr>
+          <a:xfrm>
+            <a:off x="8485632" y="2011680"/>
+            <a:ext cx="3063240" cy="594360"/>
+          </a:xfrm>
+          <a:prstGeom prst="rect">
+            <a:avLst/>
+          </a:prstGeom>
+          <a:noFill/>
+        </p:spPr>
+        <p:txBody>
+          <a:bodyPr wrap="square" lIns="45720" rIns="45720">
+            <a:spAutoFit/>
+          </a:bodyPr>
+          <a:lstStyle/>
+          <a:p>
+            <a:pPr>
+              <a:defRPr sz="1300" b="0">
+                <a:solidFill>
+                  <a:srgbClr val="2A3342"/>
+                </a:solidFill>
+                <a:latin typeface="Aptos"/>
+              </a:defRPr>
+            </a:pPr>
+            <a:r>
+              <a:t>Routes intent and coordinates tool calls</a:t>
+            </a:r>
+          </a:p>
+        </p:txBody>
+      </p:sp>
+      <p:sp>
+        <p:nvSpPr>
+          <p:cNvPr id="13" name="Rounded Rectangle 12"/>
+          <p:cNvSpPr/>
+          <p:nvPr/>
+        </p:nvSpPr>
+        <p:spPr>
+          <a:xfrm>
+            <a:off x="640080" y="3566160"/>
+            <a:ext cx="3429000" cy="1417320"/>
+          </a:xfrm>
+          <a:prstGeom prst="roundRect">
+            <a:avLst/>
+          </a:prstGeom>
+          <a:solidFill>
+            <a:srgbClr val="FFFFFF"/>
+          </a:solidFill>
+          <a:ln>
+            <a:solidFill>
+              <a:srgbClr val="D5DFEC"/>
+            </a:solidFill>
+          </a:ln>
+        </p:spPr>
+        <p:style>
+          <a:lnRef idx="1">
+            <a:schemeClr val="accent1"/>
+          </a:lnRef>
+          <a:fillRef idx="3">
+            <a:schemeClr val="accent1"/>
+          </a:fillRef>
+          <a:effectRef idx="2">
+            <a:schemeClr val="accent1"/>
+          </a:effectRef>
+          <a:fontRef idx="minor">
+            <a:schemeClr val="lt1"/>
+          </a:fontRef>
+        </p:style>
+        <p:txBody>
+          <a:bodyPr rtlCol="0" anchor="ctr"/>
+          <a:lstStyle/>
+          <a:p>
+            <a:pPr algn="ctr"/>
+            <a:endParaRPr/>
+          </a:p>
+        </p:txBody>
+      </p:sp>
+      <p:sp>
+        <p:nvSpPr>
+          <p:cNvPr id="14" name="TextBox 13"/>
+          <p:cNvSpPr txBox="1"/>
+          <p:nvPr/>
+        </p:nvSpPr>
+        <p:spPr>
+          <a:xfrm>
+            <a:off x="804671" y="3749040"/>
+            <a:ext cx="3108960" cy="320040"/>
+          </a:xfrm>
+          <a:prstGeom prst="rect">
+            <a:avLst/>
+          </a:prstGeom>
+          <a:noFill/>
+        </p:spPr>
+        <p:txBody>
+          <a:bodyPr wrap="square" lIns="45720" rIns="45720">
+            <a:spAutoFit/>
+          </a:bodyPr>
+          <a:lstStyle/>
+          <a:p>
+            <a:pPr>
+              <a:defRPr sz="1600" b="1">
+                <a:solidFill>
+                  <a:srgbClr val="1DA1A0"/>
+                </a:solidFill>
+                <a:latin typeface="Aptos"/>
+              </a:defRPr>
+            </a:pPr>
+            <a:r>
+              <a:t>4  Tools + Hybrid RAG</a:t>
+            </a:r>
+          </a:p>
+        </p:txBody>
+      </p:sp>
+      <p:sp>
+        <p:nvSpPr>
+          <p:cNvPr id="15" name="TextBox 14"/>
+          <p:cNvSpPr txBox="1"/>
+          <p:nvPr/>
+        </p:nvSpPr>
+        <p:spPr>
+          <a:xfrm>
+            <a:off x="804671" y="4160520"/>
+            <a:ext cx="3063240" cy="594360"/>
+          </a:xfrm>
+          <a:prstGeom prst="rect">
+            <a:avLst/>
+          </a:prstGeom>
+          <a:noFill/>
+        </p:spPr>
+        <p:txBody>
+          <a:bodyPr wrap="square" lIns="45720" rIns="45720">
+            <a:spAutoFit/>
+          </a:bodyPr>
+          <a:lstStyle/>
+          <a:p>
+            <a:pPr>
+              <a:defRPr sz="1300" b="0">
+                <a:solidFill>
+                  <a:srgbClr val="2A3342"/>
+                </a:solidFill>
+                <a:latin typeface="Aptos"/>
+              </a:defRPr>
+            </a:pPr>
+            <a:r>
+              <a:t>Fetches structured data or relevant policy chunks</a:t>
+            </a:r>
+          </a:p>
+        </p:txBody>
+      </p:sp>
+      <p:sp>
+        <p:nvSpPr>
+          <p:cNvPr id="16" name="Rounded Rectangle 15"/>
+          <p:cNvSpPr/>
+          <p:nvPr/>
+        </p:nvSpPr>
+        <p:spPr>
+          <a:xfrm>
+            <a:off x="4480560" y="3566160"/>
+            <a:ext cx="3429000" cy="1417320"/>
+          </a:xfrm>
+          <a:prstGeom prst="roundRect">
+            <a:avLst/>
+          </a:prstGeom>
+          <a:solidFill>
+            <a:srgbClr val="FFFFFF"/>
+          </a:solidFill>
+          <a:ln>
+            <a:solidFill>
+              <a:srgbClr val="D5DFEC"/>
+            </a:solidFill>
+          </a:ln>
+        </p:spPr>
+        <p:style>
+          <a:lnRef idx="1">
+            <a:schemeClr val="accent1"/>
+          </a:lnRef>
+          <a:fillRef idx="3">
+            <a:schemeClr val="accent1"/>
+          </a:fillRef>
+          <a:effectRef idx="2">
+            <a:schemeClr val="accent1"/>
+          </a:effectRef>
+          <a:fontRef idx="minor">
+            <a:schemeClr val="lt1"/>
+          </a:fontRef>
+        </p:style>
+        <p:txBody>
+          <a:bodyPr rtlCol="0" anchor="ctr"/>
+          <a:lstStyle/>
+          <a:p>
+            <a:pPr algn="ctr"/>
+            <a:endParaRPr/>
+          </a:p>
+        </p:txBody>
+      </p:sp>
+      <p:sp>
+        <p:nvSpPr>
+          <p:cNvPr id="17" name="TextBox 16"/>
+          <p:cNvSpPr txBox="1"/>
+          <p:nvPr/>
+        </p:nvSpPr>
+        <p:spPr>
+          <a:xfrm>
+            <a:off x="4645152" y="3749040"/>
+            <a:ext cx="3108960" cy="320040"/>
+          </a:xfrm>
+          <a:prstGeom prst="rect">
+            <a:avLst/>
+          </a:prstGeom>
+          <a:noFill/>
+        </p:spPr>
+        <p:txBody>
+          <a:bodyPr wrap="square" lIns="45720" rIns="45720">
+            <a:spAutoFit/>
+          </a:bodyPr>
+          <a:lstStyle/>
+          <a:p>
+            <a:pPr>
+              <a:defRPr sz="1600" b="1">
+                <a:solidFill>
+                  <a:srgbClr val="1DA1A0"/>
+                </a:solidFill>
+                <a:latin typeface="Aptos"/>
+              </a:defRPr>
+            </a:pPr>
+            <a:r>
+              <a:t>5  LLM + Composer</a:t>
+            </a:r>
+          </a:p>
+        </p:txBody>
+      </p:sp>
+      <p:sp>
+        <p:nvSpPr>
+          <p:cNvPr id="18" name="TextBox 17"/>
+          <p:cNvSpPr txBox="1"/>
+          <p:nvPr/>
+        </p:nvSpPr>
+        <p:spPr>
+          <a:xfrm>
+            <a:off x="4645152" y="4160520"/>
+            <a:ext cx="3063240" cy="594360"/>
+          </a:xfrm>
+          <a:prstGeom prst="rect">
+            <a:avLst/>
+          </a:prstGeom>
+          <a:noFill/>
+        </p:spPr>
+        <p:txBody>
+          <a:bodyPr wrap="square" lIns="45720" rIns="45720">
+            <a:spAutoFit/>
+          </a:bodyPr>
+          <a:lstStyle/>
+          <a:p>
+            <a:pPr>
+              <a:defRPr sz="1300" b="0">
+                <a:solidFill>
+                  <a:srgbClr val="2A3342"/>
+                </a:solidFill>
+                <a:latin typeface="Aptos"/>
+              </a:defRPr>
+            </a:pPr>
+            <a:r>
+              <a:t>Builds a grounded answer and UI-friendly output</a:t>
+            </a:r>
+          </a:p>
+        </p:txBody>
+      </p:sp>
+      <p:sp>
+        <p:nvSpPr>
+          <p:cNvPr id="19" name="Rounded Rectangle 18"/>
+          <p:cNvSpPr/>
+          <p:nvPr/>
+        </p:nvSpPr>
+        <p:spPr>
+          <a:xfrm>
+            <a:off x="8321040" y="3566160"/>
+            <a:ext cx="3429000" cy="1417320"/>
+          </a:xfrm>
+          <a:prstGeom prst="roundRect">
+            <a:avLst/>
+          </a:prstGeom>
+          <a:solidFill>
+            <a:srgbClr val="FFFFFF"/>
+          </a:solidFill>
+          <a:ln>
+            <a:solidFill>
+              <a:srgbClr val="D5DFEC"/>
+            </a:solidFill>
+          </a:ln>
+        </p:spPr>
+        <p:style>
+          <a:lnRef idx="1">
+            <a:schemeClr val="accent1"/>
+          </a:lnRef>
+          <a:fillRef idx="3">
+            <a:schemeClr val="accent1"/>
+          </a:fillRef>
+          <a:effectRef idx="2">
+            <a:schemeClr val="accent1"/>
+          </a:effectRef>
+          <a:fontRef idx="minor">
+            <a:schemeClr val="lt1"/>
+          </a:fontRef>
+        </p:style>
+        <p:txBody>
+          <a:bodyPr rtlCol="0" anchor="ctr"/>
+          <a:lstStyle/>
+          <a:p>
+            <a:pPr algn="ctr"/>
+            <a:endParaRPr/>
+          </a:p>
+        </p:txBody>
+      </p:sp>
+      <p:sp>
+        <p:nvSpPr>
+          <p:cNvPr id="20" name="TextBox 19"/>
+          <p:cNvSpPr txBox="1"/>
+          <p:nvPr/>
+        </p:nvSpPr>
+        <p:spPr>
+          <a:xfrm>
+            <a:off x="8485632" y="3749040"/>
+            <a:ext cx="3108960" cy="320040"/>
+          </a:xfrm>
+          <a:prstGeom prst="rect">
+            <a:avLst/>
+          </a:prstGeom>
+          <a:noFill/>
+        </p:spPr>
+        <p:txBody>
+          <a:bodyPr wrap="square" lIns="45720" rIns="45720">
+            <a:spAutoFit/>
+          </a:bodyPr>
+          <a:lstStyle/>
+          <a:p>
+            <a:pPr>
+              <a:defRPr sz="1600" b="1">
+                <a:solidFill>
+                  <a:srgbClr val="1DA1A0"/>
+                </a:solidFill>
+                <a:latin typeface="Aptos"/>
+              </a:defRPr>
+            </a:pPr>
+            <a:r>
+              <a:t>6  Telemetry + Feedback</a:t>
+            </a:r>
+          </a:p>
+        </p:txBody>
+      </p:sp>
+      <p:sp>
+        <p:nvSpPr>
+          <p:cNvPr id="21" name="TextBox 20"/>
+          <p:cNvSpPr txBox="1"/>
+          <p:nvPr/>
+        </p:nvSpPr>
+        <p:spPr>
+          <a:xfrm>
+            <a:off x="8485632" y="4160520"/>
+            <a:ext cx="3063240" cy="594360"/>
+          </a:xfrm>
+          <a:prstGeom prst="rect">
+            <a:avLst/>
+          </a:prstGeom>
+          <a:noFill/>
+        </p:spPr>
+        <p:txBody>
+          <a:bodyPr wrap="square" lIns="45720" rIns="45720">
+            <a:spAutoFit/>
+          </a:bodyPr>
+          <a:lstStyle/>
+          <a:p>
+            <a:pPr>
+              <a:defRPr sz="1300" b="0">
+                <a:solidFill>
+                  <a:srgbClr val="2A3342"/>
+                </a:solidFill>
+                <a:latin typeface="Aptos"/>
+              </a:defRPr>
+            </a:pPr>
+            <a:r>
+              <a:t>Logs performance and routes feedback to support</a:t>
+            </a:r>
+          </a:p>
+        </p:txBody>
+      </p:sp>
+      <p:sp>
+        <p:nvSpPr>
+          <p:cNvPr id="23" name="TextBox 22"/>
+          <p:cNvSpPr txBox="1"/>
+          <p:nvPr/>
+        </p:nvSpPr>
+        <p:spPr>
+          <a:xfrm>
+            <a:off x="11109960" y="6473952"/>
+            <a:ext cx="502920" cy="228600"/>
+          </a:xfrm>
+          <a:prstGeom prst="rect">
+            <a:avLst/>
+          </a:prstGeom>
+          <a:noFill/>
+        </p:spPr>
+        <p:txBody>
+          <a:bodyPr wrap="square" lIns="0" tIns="0" rIns="0" bIns="0">
+            <a:spAutoFit/>
+          </a:bodyPr>
+          <a:lstStyle/>
+          <a:p>
             <a:pPr algn="r">
               <a:defRPr sz="1000" b="1">
                 <a:solidFill>
@@ -5255,7 +5785,7 @@
               </a:defRPr>
             </a:pPr>
             <a:r>
-              <a:t>15</a:t>
+              <a:t>02</a:t>
             </a:r>
           </a:p>
         </p:txBody>
@@ -5268,214 +5798,8 @@
 </p:sld>
 </file>
 
-<file path=ppt/slides/slide16.xml><?xml version="1.0" encoding="utf-8"?>
-<p:sld xmlns:a="http://schemas.openxmlformats.org/drawingml/2006/main" xmlns:p="http://schemas.openxmlformats.org/presentationml/2006/main" xmlns:r="http://schemas.openxmlformats.org/officeDocument/2006/relationships">
-  <p:cSld>
-    <p:bg>
-      <p:bgPr>
-        <a:solidFill>
-          <a:srgbClr val="142242"/>
-        </a:solidFill>
-        <a:effectLst/>
-      </p:bgPr>
-    </p:bg>
-    <p:spTree>
-      <p:nvGrpSpPr>
-        <p:cNvPr id="1" name=""/>
-        <p:cNvGrpSpPr/>
-        <p:nvPr/>
-      </p:nvGrpSpPr>
-      <p:grpSpPr/>
-      <p:sp>
-        <p:nvSpPr>
-          <p:cNvPr id="2" name="TextBox 1"/>
-          <p:cNvSpPr txBox="1"/>
-          <p:nvPr/>
-        </p:nvSpPr>
-        <p:spPr>
-          <a:xfrm>
-            <a:off x="822960" y="2103120"/>
-            <a:ext cx="6400800" cy="822960"/>
-          </a:xfrm>
-          <a:prstGeom prst="rect">
-            <a:avLst/>
-          </a:prstGeom>
-          <a:noFill/>
-        </p:spPr>
-        <p:txBody>
-          <a:bodyPr wrap="square" lIns="45720" rIns="45720">
-            <a:spAutoFit/>
-          </a:bodyPr>
-          <a:lstStyle/>
-          <a:p>
-            <a:pPr>
-              <a:defRPr sz="4200" b="1">
-                <a:solidFill>
-                  <a:srgbClr val="FFFFFF"/>
-                </a:solidFill>
-                <a:latin typeface="Aptos"/>
-              </a:defRPr>
-            </a:pPr>
-            <a:r>
-              <a:t>Thank You</a:t>
-            </a:r>
-          </a:p>
-        </p:txBody>
-      </p:sp>
-      <p:sp>
-        <p:nvSpPr>
-          <p:cNvPr id="3" name="TextBox 2"/>
-          <p:cNvSpPr txBox="1"/>
-          <p:nvPr/>
-        </p:nvSpPr>
-        <p:spPr>
-          <a:xfrm>
-            <a:off x="868680" y="3063240"/>
-            <a:ext cx="6400800" cy="457200"/>
-          </a:xfrm>
-          <a:prstGeom prst="rect">
-            <a:avLst/>
-          </a:prstGeom>
-          <a:noFill/>
-        </p:spPr>
-        <p:txBody>
-          <a:bodyPr wrap="square" lIns="45720" rIns="45720">
-            <a:spAutoFit/>
-          </a:bodyPr>
-          <a:lstStyle/>
-          <a:p>
-            <a:pPr>
-              <a:defRPr sz="2400" b="0">
-                <a:solidFill>
-                  <a:srgbClr val="BED3F2"/>
-                </a:solidFill>
-                <a:latin typeface="Aptos"/>
-              </a:defRPr>
-            </a:pPr>
-            <a:r>
-              <a:t>Questions &amp; Discussion</a:t>
-            </a:r>
-          </a:p>
-        </p:txBody>
-      </p:sp>
-      <p:sp>
-        <p:nvSpPr>
-          <p:cNvPr id="4" name="TextBox 3"/>
-          <p:cNvSpPr txBox="1"/>
-          <p:nvPr/>
-        </p:nvSpPr>
-        <p:spPr>
-          <a:xfrm>
-            <a:off x="896112" y="5897880"/>
-            <a:ext cx="8046720" cy="274320"/>
-          </a:xfrm>
-          <a:prstGeom prst="rect">
-            <a:avLst/>
-          </a:prstGeom>
-          <a:noFill/>
-        </p:spPr>
-        <p:txBody>
-          <a:bodyPr wrap="square" lIns="45720" rIns="45720">
-            <a:spAutoFit/>
-          </a:bodyPr>
-          <a:lstStyle/>
-          <a:p>
-            <a:pPr>
-              <a:defRPr sz="1200" b="0">
-                <a:solidFill>
-                  <a:srgbClr val="BED3F2"/>
-                </a:solidFill>
-                <a:latin typeface="Aptos"/>
-              </a:defRPr>
-            </a:pPr>
-            <a:r>
-              <a:t>AI Chatbot System Architecture</a:t>
-            </a:r>
-          </a:p>
-        </p:txBody>
-      </p:sp>
-      <p:sp>
-        <p:nvSpPr>
-          <p:cNvPr id="5" name="TextBox 4"/>
-          <p:cNvSpPr txBox="1"/>
-          <p:nvPr/>
-        </p:nvSpPr>
-        <p:spPr>
-          <a:xfrm>
-            <a:off x="502920" y="6510528"/>
-            <a:ext cx="7772400" cy="164592"/>
-          </a:xfrm>
-          <a:prstGeom prst="rect">
-            <a:avLst/>
-          </a:prstGeom>
-          <a:noFill/>
-        </p:spPr>
-        <p:txBody>
-          <a:bodyPr wrap="square" lIns="0" rIns="0" tIns="0" bIns="0">
-            <a:spAutoFit/>
-          </a:bodyPr>
-          <a:lstStyle/>
-          <a:p>
-            <a:pPr>
-              <a:defRPr sz="900" b="1">
-                <a:solidFill>
-                  <a:srgbClr val="CED8E7"/>
-                </a:solidFill>
-                <a:latin typeface="Aptos"/>
-              </a:defRPr>
-            </a:pPr>
-            <a:r>
-              <a:t>AI CHATBOT  •  SYSTEM OVERVIEW</a:t>
-            </a:r>
-          </a:p>
-        </p:txBody>
-      </p:sp>
-      <p:sp>
-        <p:nvSpPr>
-          <p:cNvPr id="6" name="TextBox 5"/>
-          <p:cNvSpPr txBox="1"/>
-          <p:nvPr/>
-        </p:nvSpPr>
-        <p:spPr>
-          <a:xfrm>
-            <a:off x="11109960" y="6473952"/>
-            <a:ext cx="502920" cy="228600"/>
-          </a:xfrm>
-          <a:prstGeom prst="rect">
-            <a:avLst/>
-          </a:prstGeom>
-          <a:noFill/>
-        </p:spPr>
-        <p:txBody>
-          <a:bodyPr wrap="square" lIns="0" rIns="0" tIns="0" bIns="0">
-            <a:spAutoFit/>
-          </a:bodyPr>
-          <a:lstStyle/>
-          <a:p>
-            <a:pPr algn="r">
-              <a:defRPr sz="1000" b="1">
-                <a:solidFill>
-                  <a:srgbClr val="CED8E7"/>
-                </a:solidFill>
-                <a:latin typeface="Aptos"/>
-              </a:defRPr>
-            </a:pPr>
-            <a:r>
-              <a:t>16</a:t>
-            </a:r>
-          </a:p>
-        </p:txBody>
-      </p:sp>
-    </p:spTree>
-  </p:cSld>
-  <p:clrMapOvr>
-    <a:masterClrMapping/>
-  </p:clrMapOvr>
-</p:sld>
-</file>
-
-<file path=ppt/slides/slide2.xml><?xml version="1.0" encoding="utf-8"?>
-<p:sld xmlns:a="http://schemas.openxmlformats.org/drawingml/2006/main" xmlns:p="http://schemas.openxmlformats.org/presentationml/2006/main" xmlns:r="http://schemas.openxmlformats.org/officeDocument/2006/relationships">
+<file path=ppt/slides/slide3.xml><?xml version="1.0" encoding="utf-8"?>
+<p:sld xmlns:a="http://schemas.openxmlformats.org/drawingml/2006/main" xmlns:r="http://schemas.openxmlformats.org/officeDocument/2006/relationships" xmlns:p="http://schemas.openxmlformats.org/presentationml/2006/main">
   <p:cSld>
     <p:bg>
       <p:bgPr>
@@ -5491,7 +5815,14 @@
         <p:cNvGrpSpPr/>
         <p:nvPr/>
       </p:nvGrpSpPr>
-      <p:grpSpPr/>
+      <p:grpSpPr>
+        <a:xfrm>
+          <a:off x="0" y="0"/>
+          <a:ext cx="0" cy="0"/>
+          <a:chOff x="0" y="0"/>
+          <a:chExt cx="0" cy="0"/>
+        </a:xfrm>
+      </p:grpSpPr>
       <p:sp>
         <p:nvSpPr>
           <p:cNvPr id="2" name="Rectangle 1"/>
@@ -5507,7 +5838,7 @@
             <a:avLst/>
           </a:prstGeom>
           <a:solidFill>
-            <a:srgbClr val="1DA1A0"/>
+            <a:srgbClr val="2F69BE"/>
           </a:solidFill>
           <a:ln>
             <a:noFill/>
@@ -5532,6 +5863,7 @@
           <a:lstStyle/>
           <a:p>
             <a:pPr algn="ctr"/>
+            <a:endParaRPr/>
           </a:p>
         </p:txBody>
       </p:sp>
@@ -5566,7 +5898,7 @@
               </a:defRPr>
             </a:pPr>
             <a:r>
-              <a:t>High-Level Architecture</a:t>
+              <a:t>System at a Glance</a:t>
             </a:r>
           </a:p>
         </p:txBody>
@@ -5579,8 +5911,8 @@
         </p:nvSpPr>
         <p:spPr>
           <a:xfrm>
-            <a:off x="640080" y="1417320"/>
-            <a:ext cx="3429000" cy="1417320"/>
+            <a:off x="685800" y="1371600"/>
+            <a:ext cx="10835640" cy="4892040"/>
           </a:xfrm>
           <a:prstGeom prst="roundRect">
             <a:avLst/>
@@ -5590,7 +5922,7 @@
           </a:solidFill>
           <a:ln>
             <a:solidFill>
-              <a:srgbClr val="D5DFEC"/>
+              <a:srgbClr val="DEE5EF"/>
             </a:solidFill>
           </a:ln>
         </p:spPr>
@@ -5609,23 +5941,105 @@
           </a:fontRef>
         </p:style>
         <p:txBody>
-          <a:bodyPr rtlCol="0" anchor="ctr"/>
-          <a:lstStyle/>
-          <a:p>
-            <a:pPr algn="ctr"/>
-          </a:p>
-        </p:txBody>
-      </p:sp>
-      <p:sp>
-        <p:nvSpPr>
-          <p:cNvPr id="5" name="TextBox 4"/>
+          <a:bodyPr wrap="square" lIns="347472" tIns="274320" rIns="292608" bIns="182880" rtlCol="0" anchor="ctr"/>
+          <a:lstStyle/>
+          <a:p>
+            <a:pPr>
+              <a:spcAft>
+                <a:spcPts val="1200"/>
+              </a:spcAft>
+              <a:defRPr sz="1600">
+                <a:solidFill>
+                  <a:srgbClr val="2A3342"/>
+                </a:solidFill>
+                <a:latin typeface="Aptos"/>
+              </a:defRPr>
+            </a:pPr>
+            <a:r>
+              <a:rPr lang="en-US" dirty="0"/>
+              <a:t>•  Python backend exposes APIs and coordinates requests</a:t>
+            </a:r>
+          </a:p>
+          <a:p>
+            <a:pPr>
+              <a:spcAft>
+                <a:spcPts val="1200"/>
+              </a:spcAft>
+              <a:defRPr sz="1600">
+                <a:solidFill>
+                  <a:srgbClr val="2A3342"/>
+                </a:solidFill>
+                <a:latin typeface="Aptos"/>
+              </a:defRPr>
+            </a:pPr>
+            <a:r>
+              <a:rPr lang="en-US" dirty="0"/>
+              <a:t>•  Mobile application provides chat, settings, knowledge management, and answer cards</a:t>
+            </a:r>
+          </a:p>
+          <a:p>
+            <a:pPr>
+              <a:spcAft>
+                <a:spcPts val="1200"/>
+              </a:spcAft>
+              <a:defRPr sz="1600">
+                <a:solidFill>
+                  <a:srgbClr val="2A3342"/>
+                </a:solidFill>
+                <a:latin typeface="Aptos"/>
+              </a:defRPr>
+            </a:pPr>
+            <a:r>
+              <a:rPr lang="en-US" dirty="0"/>
+              <a:t>•  Hybrid RAG grounds company-specific answers in organization documents</a:t>
+            </a:r>
+          </a:p>
+          <a:p>
+            <a:pPr>
+              <a:spcAft>
+                <a:spcPts val="1200"/>
+              </a:spcAft>
+              <a:defRPr sz="1600">
+                <a:solidFill>
+                  <a:srgbClr val="2A3342"/>
+                </a:solidFill>
+                <a:latin typeface="Aptos"/>
+              </a:defRPr>
+            </a:pPr>
+            <a:r>
+              <a:rPr lang="en-US" dirty="0"/>
+              <a:t>•  Tools retrieve chit, finance, profile, and policy information</a:t>
+            </a:r>
+          </a:p>
+          <a:p>
+            <a:pPr>
+              <a:spcAft>
+                <a:spcPts val="1200"/>
+              </a:spcAft>
+              <a:defRPr sz="1600">
+                <a:solidFill>
+                  <a:srgbClr val="2A3342"/>
+                </a:solidFill>
+                <a:latin typeface="Aptos"/>
+              </a:defRPr>
+            </a:pPr>
+            <a:r>
+              <a:rPr lang="en-US" dirty="0"/>
+              <a:t>•  Telemetry and feedback support monitoring and continuous improvement</a:t>
+            </a:r>
+          </a:p>
+        </p:txBody>
+      </p:sp>
+      <p:sp>
+        <p:nvSpPr>
+          <p:cNvPr id="6" name="TextBox 5"/>
           <p:cNvSpPr txBox="1"/>
           <p:nvPr/>
         </p:nvSpPr>
         <p:spPr>
           <a:xfrm>
-            <a:off x="804671" y="1600200"/>
-            <a:ext cx="3108960" cy="320040"/>
+            <a:off x="11109960" y="6473952"/>
+            <a:ext cx="502920" cy="228600"/>
           </a:xfrm>
           <a:prstGeom prst="rect">
             <a:avLst/>
@@ -5633,704 +6047,11 @@
           <a:noFill/>
         </p:spPr>
         <p:txBody>
-          <a:bodyPr wrap="square" lIns="45720" rIns="45720">
+          <a:bodyPr wrap="square" lIns="0" tIns="0" rIns="0" bIns="0">
             <a:spAutoFit/>
           </a:bodyPr>
           <a:lstStyle/>
           <a:p>
-            <a:pPr>
-              <a:defRPr sz="1600" b="1">
-                <a:solidFill>
-                  <a:srgbClr val="2F69BE"/>
-                </a:solidFill>
-                <a:latin typeface="Aptos"/>
-              </a:defRPr>
-            </a:pPr>
-            <a:r>
-              <a:t>1  Mobile App</a:t>
-            </a:r>
-          </a:p>
-        </p:txBody>
-      </p:sp>
-      <p:sp>
-        <p:nvSpPr>
-          <p:cNvPr id="6" name="TextBox 5"/>
-          <p:cNvSpPr txBox="1"/>
-          <p:nvPr/>
-        </p:nvSpPr>
-        <p:spPr>
-          <a:xfrm>
-            <a:off x="804671" y="2011680"/>
-            <a:ext cx="3063240" cy="594360"/>
-          </a:xfrm>
-          <a:prstGeom prst="rect">
-            <a:avLst/>
-          </a:prstGeom>
-          <a:noFill/>
-        </p:spPr>
-        <p:txBody>
-          <a:bodyPr wrap="square" lIns="45720" rIns="45720">
-            <a:spAutoFit/>
-          </a:bodyPr>
-          <a:lstStyle/>
-          <a:p>
-            <a:pPr>
-              <a:defRPr sz="1300" b="0">
-                <a:solidFill>
-                  <a:srgbClr val="2A3342"/>
-                </a:solidFill>
-                <a:latin typeface="Aptos"/>
-              </a:defRPr>
-            </a:pPr>
-            <a:r>
-              <a:t>Chat screen, settings, knowledge admin, answer cards</a:t>
-            </a:r>
-          </a:p>
-        </p:txBody>
-      </p:sp>
-      <p:sp>
-        <p:nvSpPr>
-          <p:cNvPr id="7" name="Rounded Rectangle 6"/>
-          <p:cNvSpPr/>
-          <p:nvPr/>
-        </p:nvSpPr>
-        <p:spPr>
-          <a:xfrm>
-            <a:off x="4480560" y="1417320"/>
-            <a:ext cx="3429000" cy="1417320"/>
-          </a:xfrm>
-          <a:prstGeom prst="roundRect">
-            <a:avLst/>
-          </a:prstGeom>
-          <a:solidFill>
-            <a:srgbClr val="FFFFFF"/>
-          </a:solidFill>
-          <a:ln>
-            <a:solidFill>
-              <a:srgbClr val="D5DFEC"/>
-            </a:solidFill>
-          </a:ln>
-        </p:spPr>
-        <p:style>
-          <a:lnRef idx="1">
-            <a:schemeClr val="accent1"/>
-          </a:lnRef>
-          <a:fillRef idx="3">
-            <a:schemeClr val="accent1"/>
-          </a:fillRef>
-          <a:effectRef idx="2">
-            <a:schemeClr val="accent1"/>
-          </a:effectRef>
-          <a:fontRef idx="minor">
-            <a:schemeClr val="lt1"/>
-          </a:fontRef>
-        </p:style>
-        <p:txBody>
-          <a:bodyPr rtlCol="0" anchor="ctr"/>
-          <a:lstStyle/>
-          <a:p>
-            <a:pPr algn="ctr"/>
-          </a:p>
-        </p:txBody>
-      </p:sp>
-      <p:sp>
-        <p:nvSpPr>
-          <p:cNvPr id="8" name="TextBox 7"/>
-          <p:cNvSpPr txBox="1"/>
-          <p:nvPr/>
-        </p:nvSpPr>
-        <p:spPr>
-          <a:xfrm>
-            <a:off x="4645152" y="1600200"/>
-            <a:ext cx="3108960" cy="320040"/>
-          </a:xfrm>
-          <a:prstGeom prst="rect">
-            <a:avLst/>
-          </a:prstGeom>
-          <a:noFill/>
-        </p:spPr>
-        <p:txBody>
-          <a:bodyPr wrap="square" lIns="45720" rIns="45720">
-            <a:spAutoFit/>
-          </a:bodyPr>
-          <a:lstStyle/>
-          <a:p>
-            <a:pPr>
-              <a:defRPr sz="1600" b="1">
-                <a:solidFill>
-                  <a:srgbClr val="2F69BE"/>
-                </a:solidFill>
-                <a:latin typeface="Aptos"/>
-              </a:defRPr>
-            </a:pPr>
-            <a:r>
-              <a:t>2  Flask API</a:t>
-            </a:r>
-          </a:p>
-        </p:txBody>
-      </p:sp>
-      <p:sp>
-        <p:nvSpPr>
-          <p:cNvPr id="9" name="TextBox 8"/>
-          <p:cNvSpPr txBox="1"/>
-          <p:nvPr/>
-        </p:nvSpPr>
-        <p:spPr>
-          <a:xfrm>
-            <a:off x="4645152" y="2011680"/>
-            <a:ext cx="3063240" cy="594360"/>
-          </a:xfrm>
-          <a:prstGeom prst="rect">
-            <a:avLst/>
-          </a:prstGeom>
-          <a:noFill/>
-        </p:spPr>
-        <p:txBody>
-          <a:bodyPr wrap="square" lIns="45720" rIns="45720">
-            <a:spAutoFit/>
-          </a:bodyPr>
-          <a:lstStyle/>
-          <a:p>
-            <a:pPr>
-              <a:defRPr sz="1300" b="0">
-                <a:solidFill>
-                  <a:srgbClr val="2A3342"/>
-                </a:solidFill>
-                <a:latin typeface="Aptos"/>
-              </a:defRPr>
-            </a:pPr>
-            <a:r>
-              <a:t>Receives requests and returns responses</a:t>
-            </a:r>
-          </a:p>
-        </p:txBody>
-      </p:sp>
-      <p:sp>
-        <p:nvSpPr>
-          <p:cNvPr id="10" name="Rounded Rectangle 9"/>
-          <p:cNvSpPr/>
-          <p:nvPr/>
-        </p:nvSpPr>
-        <p:spPr>
-          <a:xfrm>
-            <a:off x="8321040" y="1417320"/>
-            <a:ext cx="3429000" cy="1417320"/>
-          </a:xfrm>
-          <a:prstGeom prst="roundRect">
-            <a:avLst/>
-          </a:prstGeom>
-          <a:solidFill>
-            <a:srgbClr val="FFFFFF"/>
-          </a:solidFill>
-          <a:ln>
-            <a:solidFill>
-              <a:srgbClr val="D5DFEC"/>
-            </a:solidFill>
-          </a:ln>
-        </p:spPr>
-        <p:style>
-          <a:lnRef idx="1">
-            <a:schemeClr val="accent1"/>
-          </a:lnRef>
-          <a:fillRef idx="3">
-            <a:schemeClr val="accent1"/>
-          </a:fillRef>
-          <a:effectRef idx="2">
-            <a:schemeClr val="accent1"/>
-          </a:effectRef>
-          <a:fontRef idx="minor">
-            <a:schemeClr val="lt1"/>
-          </a:fontRef>
-        </p:style>
-        <p:txBody>
-          <a:bodyPr rtlCol="0" anchor="ctr"/>
-          <a:lstStyle/>
-          <a:p>
-            <a:pPr algn="ctr"/>
-          </a:p>
-        </p:txBody>
-      </p:sp>
-      <p:sp>
-        <p:nvSpPr>
-          <p:cNvPr id="11" name="TextBox 10"/>
-          <p:cNvSpPr txBox="1"/>
-          <p:nvPr/>
-        </p:nvSpPr>
-        <p:spPr>
-          <a:xfrm>
-            <a:off x="8485632" y="1600200"/>
-            <a:ext cx="3108960" cy="320040"/>
-          </a:xfrm>
-          <a:prstGeom prst="rect">
-            <a:avLst/>
-          </a:prstGeom>
-          <a:noFill/>
-        </p:spPr>
-        <p:txBody>
-          <a:bodyPr wrap="square" lIns="45720" rIns="45720">
-            <a:spAutoFit/>
-          </a:bodyPr>
-          <a:lstStyle/>
-          <a:p>
-            <a:pPr>
-              <a:defRPr sz="1600" b="1">
-                <a:solidFill>
-                  <a:srgbClr val="2F69BE"/>
-                </a:solidFill>
-                <a:latin typeface="Aptos"/>
-              </a:defRPr>
-            </a:pPr>
-            <a:r>
-              <a:t>3  Agent + Router</a:t>
-            </a:r>
-          </a:p>
-        </p:txBody>
-      </p:sp>
-      <p:sp>
-        <p:nvSpPr>
-          <p:cNvPr id="12" name="TextBox 11"/>
-          <p:cNvSpPr txBox="1"/>
-          <p:nvPr/>
-        </p:nvSpPr>
-        <p:spPr>
-          <a:xfrm>
-            <a:off x="8485632" y="2011680"/>
-            <a:ext cx="3063240" cy="594360"/>
-          </a:xfrm>
-          <a:prstGeom prst="rect">
-            <a:avLst/>
-          </a:prstGeom>
-          <a:noFill/>
-        </p:spPr>
-        <p:txBody>
-          <a:bodyPr wrap="square" lIns="45720" rIns="45720">
-            <a:spAutoFit/>
-          </a:bodyPr>
-          <a:lstStyle/>
-          <a:p>
-            <a:pPr>
-              <a:defRPr sz="1300" b="0">
-                <a:solidFill>
-                  <a:srgbClr val="2A3342"/>
-                </a:solidFill>
-                <a:latin typeface="Aptos"/>
-              </a:defRPr>
-            </a:pPr>
-            <a:r>
-              <a:t>Routes intent and coordinates tool calls</a:t>
-            </a:r>
-          </a:p>
-        </p:txBody>
-      </p:sp>
-      <p:sp>
-        <p:nvSpPr>
-          <p:cNvPr id="13" name="Rounded Rectangle 12"/>
-          <p:cNvSpPr/>
-          <p:nvPr/>
-        </p:nvSpPr>
-        <p:spPr>
-          <a:xfrm>
-            <a:off x="640080" y="3566160"/>
-            <a:ext cx="3429000" cy="1417320"/>
-          </a:xfrm>
-          <a:prstGeom prst="roundRect">
-            <a:avLst/>
-          </a:prstGeom>
-          <a:solidFill>
-            <a:srgbClr val="FFFFFF"/>
-          </a:solidFill>
-          <a:ln>
-            <a:solidFill>
-              <a:srgbClr val="D5DFEC"/>
-            </a:solidFill>
-          </a:ln>
-        </p:spPr>
-        <p:style>
-          <a:lnRef idx="1">
-            <a:schemeClr val="accent1"/>
-          </a:lnRef>
-          <a:fillRef idx="3">
-            <a:schemeClr val="accent1"/>
-          </a:fillRef>
-          <a:effectRef idx="2">
-            <a:schemeClr val="accent1"/>
-          </a:effectRef>
-          <a:fontRef idx="minor">
-            <a:schemeClr val="lt1"/>
-          </a:fontRef>
-        </p:style>
-        <p:txBody>
-          <a:bodyPr rtlCol="0" anchor="ctr"/>
-          <a:lstStyle/>
-          <a:p>
-            <a:pPr algn="ctr"/>
-          </a:p>
-        </p:txBody>
-      </p:sp>
-      <p:sp>
-        <p:nvSpPr>
-          <p:cNvPr id="14" name="TextBox 13"/>
-          <p:cNvSpPr txBox="1"/>
-          <p:nvPr/>
-        </p:nvSpPr>
-        <p:spPr>
-          <a:xfrm>
-            <a:off x="804671" y="3749040"/>
-            <a:ext cx="3108960" cy="320040"/>
-          </a:xfrm>
-          <a:prstGeom prst="rect">
-            <a:avLst/>
-          </a:prstGeom>
-          <a:noFill/>
-        </p:spPr>
-        <p:txBody>
-          <a:bodyPr wrap="square" lIns="45720" rIns="45720">
-            <a:spAutoFit/>
-          </a:bodyPr>
-          <a:lstStyle/>
-          <a:p>
-            <a:pPr>
-              <a:defRPr sz="1600" b="1">
-                <a:solidFill>
-                  <a:srgbClr val="1DA1A0"/>
-                </a:solidFill>
-                <a:latin typeface="Aptos"/>
-              </a:defRPr>
-            </a:pPr>
-            <a:r>
-              <a:t>4  Tools + Hybrid RAG</a:t>
-            </a:r>
-          </a:p>
-        </p:txBody>
-      </p:sp>
-      <p:sp>
-        <p:nvSpPr>
-          <p:cNvPr id="15" name="TextBox 14"/>
-          <p:cNvSpPr txBox="1"/>
-          <p:nvPr/>
-        </p:nvSpPr>
-        <p:spPr>
-          <a:xfrm>
-            <a:off x="804671" y="4160520"/>
-            <a:ext cx="3063240" cy="594360"/>
-          </a:xfrm>
-          <a:prstGeom prst="rect">
-            <a:avLst/>
-          </a:prstGeom>
-          <a:noFill/>
-        </p:spPr>
-        <p:txBody>
-          <a:bodyPr wrap="square" lIns="45720" rIns="45720">
-            <a:spAutoFit/>
-          </a:bodyPr>
-          <a:lstStyle/>
-          <a:p>
-            <a:pPr>
-              <a:defRPr sz="1300" b="0">
-                <a:solidFill>
-                  <a:srgbClr val="2A3342"/>
-                </a:solidFill>
-                <a:latin typeface="Aptos"/>
-              </a:defRPr>
-            </a:pPr>
-            <a:r>
-              <a:t>Fetches structured data or relevant policy chunks</a:t>
-            </a:r>
-          </a:p>
-        </p:txBody>
-      </p:sp>
-      <p:sp>
-        <p:nvSpPr>
-          <p:cNvPr id="16" name="Rounded Rectangle 15"/>
-          <p:cNvSpPr/>
-          <p:nvPr/>
-        </p:nvSpPr>
-        <p:spPr>
-          <a:xfrm>
-            <a:off x="4480560" y="3566160"/>
-            <a:ext cx="3429000" cy="1417320"/>
-          </a:xfrm>
-          <a:prstGeom prst="roundRect">
-            <a:avLst/>
-          </a:prstGeom>
-          <a:solidFill>
-            <a:srgbClr val="FFFFFF"/>
-          </a:solidFill>
-          <a:ln>
-            <a:solidFill>
-              <a:srgbClr val="D5DFEC"/>
-            </a:solidFill>
-          </a:ln>
-        </p:spPr>
-        <p:style>
-          <a:lnRef idx="1">
-            <a:schemeClr val="accent1"/>
-          </a:lnRef>
-          <a:fillRef idx="3">
-            <a:schemeClr val="accent1"/>
-          </a:fillRef>
-          <a:effectRef idx="2">
-            <a:schemeClr val="accent1"/>
-          </a:effectRef>
-          <a:fontRef idx="minor">
-            <a:schemeClr val="lt1"/>
-          </a:fontRef>
-        </p:style>
-        <p:txBody>
-          <a:bodyPr rtlCol="0" anchor="ctr"/>
-          <a:lstStyle/>
-          <a:p>
-            <a:pPr algn="ctr"/>
-          </a:p>
-        </p:txBody>
-      </p:sp>
-      <p:sp>
-        <p:nvSpPr>
-          <p:cNvPr id="17" name="TextBox 16"/>
-          <p:cNvSpPr txBox="1"/>
-          <p:nvPr/>
-        </p:nvSpPr>
-        <p:spPr>
-          <a:xfrm>
-            <a:off x="4645152" y="3749040"/>
-            <a:ext cx="3108960" cy="320040"/>
-          </a:xfrm>
-          <a:prstGeom prst="rect">
-            <a:avLst/>
-          </a:prstGeom>
-          <a:noFill/>
-        </p:spPr>
-        <p:txBody>
-          <a:bodyPr wrap="square" lIns="45720" rIns="45720">
-            <a:spAutoFit/>
-          </a:bodyPr>
-          <a:lstStyle/>
-          <a:p>
-            <a:pPr>
-              <a:defRPr sz="1600" b="1">
-                <a:solidFill>
-                  <a:srgbClr val="1DA1A0"/>
-                </a:solidFill>
-                <a:latin typeface="Aptos"/>
-              </a:defRPr>
-            </a:pPr>
-            <a:r>
-              <a:t>5  LLM + Composer</a:t>
-            </a:r>
-          </a:p>
-        </p:txBody>
-      </p:sp>
-      <p:sp>
-        <p:nvSpPr>
-          <p:cNvPr id="18" name="TextBox 17"/>
-          <p:cNvSpPr txBox="1"/>
-          <p:nvPr/>
-        </p:nvSpPr>
-        <p:spPr>
-          <a:xfrm>
-            <a:off x="4645152" y="4160520"/>
-            <a:ext cx="3063240" cy="594360"/>
-          </a:xfrm>
-          <a:prstGeom prst="rect">
-            <a:avLst/>
-          </a:prstGeom>
-          <a:noFill/>
-        </p:spPr>
-        <p:txBody>
-          <a:bodyPr wrap="square" lIns="45720" rIns="45720">
-            <a:spAutoFit/>
-          </a:bodyPr>
-          <a:lstStyle/>
-          <a:p>
-            <a:pPr>
-              <a:defRPr sz="1300" b="0">
-                <a:solidFill>
-                  <a:srgbClr val="2A3342"/>
-                </a:solidFill>
-                <a:latin typeface="Aptos"/>
-              </a:defRPr>
-            </a:pPr>
-            <a:r>
-              <a:t>Builds a grounded answer and UI-friendly output</a:t>
-            </a:r>
-          </a:p>
-        </p:txBody>
-      </p:sp>
-      <p:sp>
-        <p:nvSpPr>
-          <p:cNvPr id="19" name="Rounded Rectangle 18"/>
-          <p:cNvSpPr/>
-          <p:nvPr/>
-        </p:nvSpPr>
-        <p:spPr>
-          <a:xfrm>
-            <a:off x="8321040" y="3566160"/>
-            <a:ext cx="3429000" cy="1417320"/>
-          </a:xfrm>
-          <a:prstGeom prst="roundRect">
-            <a:avLst/>
-          </a:prstGeom>
-          <a:solidFill>
-            <a:srgbClr val="FFFFFF"/>
-          </a:solidFill>
-          <a:ln>
-            <a:solidFill>
-              <a:srgbClr val="D5DFEC"/>
-            </a:solidFill>
-          </a:ln>
-        </p:spPr>
-        <p:style>
-          <a:lnRef idx="1">
-            <a:schemeClr val="accent1"/>
-          </a:lnRef>
-          <a:fillRef idx="3">
-            <a:schemeClr val="accent1"/>
-          </a:fillRef>
-          <a:effectRef idx="2">
-            <a:schemeClr val="accent1"/>
-          </a:effectRef>
-          <a:fontRef idx="minor">
-            <a:schemeClr val="lt1"/>
-          </a:fontRef>
-        </p:style>
-        <p:txBody>
-          <a:bodyPr rtlCol="0" anchor="ctr"/>
-          <a:lstStyle/>
-          <a:p>
-            <a:pPr algn="ctr"/>
-          </a:p>
-        </p:txBody>
-      </p:sp>
-      <p:sp>
-        <p:nvSpPr>
-          <p:cNvPr id="20" name="TextBox 19"/>
-          <p:cNvSpPr txBox="1"/>
-          <p:nvPr/>
-        </p:nvSpPr>
-        <p:spPr>
-          <a:xfrm>
-            <a:off x="8485632" y="3749040"/>
-            <a:ext cx="3108960" cy="320040"/>
-          </a:xfrm>
-          <a:prstGeom prst="rect">
-            <a:avLst/>
-          </a:prstGeom>
-          <a:noFill/>
-        </p:spPr>
-        <p:txBody>
-          <a:bodyPr wrap="square" lIns="45720" rIns="45720">
-            <a:spAutoFit/>
-          </a:bodyPr>
-          <a:lstStyle/>
-          <a:p>
-            <a:pPr>
-              <a:defRPr sz="1600" b="1">
-                <a:solidFill>
-                  <a:srgbClr val="1DA1A0"/>
-                </a:solidFill>
-                <a:latin typeface="Aptos"/>
-              </a:defRPr>
-            </a:pPr>
-            <a:r>
-              <a:t>6  Telemetry + Feedback</a:t>
-            </a:r>
-          </a:p>
-        </p:txBody>
-      </p:sp>
-      <p:sp>
-        <p:nvSpPr>
-          <p:cNvPr id="21" name="TextBox 20"/>
-          <p:cNvSpPr txBox="1"/>
-          <p:nvPr/>
-        </p:nvSpPr>
-        <p:spPr>
-          <a:xfrm>
-            <a:off x="8485632" y="4160520"/>
-            <a:ext cx="3063240" cy="594360"/>
-          </a:xfrm>
-          <a:prstGeom prst="rect">
-            <a:avLst/>
-          </a:prstGeom>
-          <a:noFill/>
-        </p:spPr>
-        <p:txBody>
-          <a:bodyPr wrap="square" lIns="45720" rIns="45720">
-            <a:spAutoFit/>
-          </a:bodyPr>
-          <a:lstStyle/>
-          <a:p>
-            <a:pPr>
-              <a:defRPr sz="1300" b="0">
-                <a:solidFill>
-                  <a:srgbClr val="2A3342"/>
-                </a:solidFill>
-                <a:latin typeface="Aptos"/>
-              </a:defRPr>
-            </a:pPr>
-            <a:r>
-              <a:t>Logs performance and routes feedback to support</a:t>
-            </a:r>
-          </a:p>
-        </p:txBody>
-      </p:sp>
-      <p:sp>
-        <p:nvSpPr>
-          <p:cNvPr id="22" name="TextBox 21"/>
-          <p:cNvSpPr txBox="1"/>
-          <p:nvPr/>
-        </p:nvSpPr>
-        <p:spPr>
-          <a:xfrm>
-            <a:off x="502920" y="6510528"/>
-            <a:ext cx="7772400" cy="164592"/>
-          </a:xfrm>
-          <a:prstGeom prst="rect">
-            <a:avLst/>
-          </a:prstGeom>
-          <a:noFill/>
-        </p:spPr>
-        <p:txBody>
-          <a:bodyPr wrap="square" lIns="0" rIns="0" tIns="0" bIns="0">
-            <a:spAutoFit/>
-          </a:bodyPr>
-          <a:lstStyle/>
-          <a:p>
-            <a:pPr>
-              <a:defRPr sz="900" b="1">
-                <a:solidFill>
-                  <a:srgbClr val="636F82"/>
-                </a:solidFill>
-                <a:latin typeface="Aptos"/>
-              </a:defRPr>
-            </a:pPr>
-            <a:r>
-              <a:t>AI CHATBOT  •  SYSTEM OVERVIEW</a:t>
-            </a:r>
-          </a:p>
-        </p:txBody>
-      </p:sp>
-      <p:sp>
-        <p:nvSpPr>
-          <p:cNvPr id="23" name="TextBox 22"/>
-          <p:cNvSpPr txBox="1"/>
-          <p:nvPr/>
-        </p:nvSpPr>
-        <p:spPr>
-          <a:xfrm>
-            <a:off x="11109960" y="6473952"/>
-            <a:ext cx="502920" cy="228600"/>
-          </a:xfrm>
-          <a:prstGeom prst="rect">
-            <a:avLst/>
-          </a:prstGeom>
-          <a:noFill/>
-        </p:spPr>
-        <p:txBody>
-          <a:bodyPr wrap="square" lIns="0" rIns="0" tIns="0" bIns="0">
-            <a:spAutoFit/>
-          </a:bodyPr>
-          <a:lstStyle/>
-          <a:p>
             <a:pPr algn="r">
               <a:defRPr sz="1000" b="1">
                 <a:solidFill>
@@ -6340,7 +6061,7 @@
               </a:defRPr>
             </a:pPr>
             <a:r>
-              <a:t>02</a:t>
+              <a:t>03</a:t>
             </a:r>
           </a:p>
         </p:txBody>
@@ -6353,8 +6074,8 @@
 </p:sld>
 </file>
 
-<file path=ppt/slides/slide3.xml><?xml version="1.0" encoding="utf-8"?>
-<p:sld xmlns:a="http://schemas.openxmlformats.org/drawingml/2006/main" xmlns:p="http://schemas.openxmlformats.org/presentationml/2006/main" xmlns:r="http://schemas.openxmlformats.org/officeDocument/2006/relationships">
+<file path=ppt/slides/slide4.xml><?xml version="1.0" encoding="utf-8"?>
+<p:sld xmlns:a="http://schemas.openxmlformats.org/drawingml/2006/main" xmlns:r="http://schemas.openxmlformats.org/officeDocument/2006/relationships" xmlns:p="http://schemas.openxmlformats.org/presentationml/2006/main">
   <p:cSld>
     <p:bg>
       <p:bgPr>
@@ -6370,7 +6091,14 @@
         <p:cNvGrpSpPr/>
         <p:nvPr/>
       </p:nvGrpSpPr>
-      <p:grpSpPr/>
+      <p:grpSpPr>
+        <a:xfrm>
+          <a:off x="0" y="0"/>
+          <a:ext cx="0" cy="0"/>
+          <a:chOff x="0" y="0"/>
+          <a:chExt cx="0" cy="0"/>
+        </a:xfrm>
+      </p:grpSpPr>
       <p:sp>
         <p:nvSpPr>
           <p:cNvPr id="2" name="Rectangle 1"/>
@@ -6386,7 +6114,7 @@
             <a:avLst/>
           </a:prstGeom>
           <a:solidFill>
-            <a:srgbClr val="2F69BE"/>
+            <a:srgbClr val="1DA1A0"/>
           </a:solidFill>
           <a:ln>
             <a:noFill/>
@@ -6411,6 +6139,7 @@
           <a:lstStyle/>
           <a:p>
             <a:pPr algn="ctr"/>
+            <a:endParaRPr/>
           </a:p>
         </p:txBody>
       </p:sp>
@@ -6445,7 +6174,7 @@
               </a:defRPr>
             </a:pPr>
             <a:r>
-              <a:t>System at a Glance</a:t>
+              <a:t>Python Backend: Request Flow</a:t>
             </a:r>
           </a:p>
         </p:txBody>
@@ -6488,30 +6217,14 @@
           </a:fontRef>
         </p:style>
         <p:txBody>
-          <a:bodyPr rtlCol="0" anchor="ctr" wrap="square" lIns="347472" rIns="292608" tIns="274320" bIns="182880"/>
-          <a:lstStyle/>
-          <a:p>
-            <a:pPr algn="ctr">
-              <a:spcAft>
-                <a:spcPts val="1200"/>
-              </a:spcAft>
-              <a:defRPr sz="1600">
-                <a:solidFill>
-                  <a:srgbClr val="2A3342"/>
-                </a:solidFill>
-                <a:latin typeface="Aptos"/>
-              </a:defRPr>
-            </a:pPr>
-            <a:r>
-              <a:t>•  Python backend exposes APIs and coordinates requests</a:t>
-            </a:r>
-          </a:p>
+          <a:bodyPr wrap="square" lIns="347472" tIns="274320" rIns="292608" bIns="182880" rtlCol="0" anchor="ctr"/>
+          <a:lstStyle/>
           <a:p>
             <a:pPr>
               <a:spcAft>
-                <a:spcPts val="1200"/>
+                <a:spcPts val="1800"/>
               </a:spcAft>
-              <a:defRPr sz="1600">
+              <a:defRPr sz="1800">
                 <a:solidFill>
                   <a:srgbClr val="2A3342"/>
                 </a:solidFill>
@@ -6519,15 +6232,24 @@
               </a:defRPr>
             </a:pPr>
             <a:r>
-              <a:t>•  Mobile application provides chat, settings, knowledge management, and answer cards</a:t>
+              <a:rPr dirty="0"/>
+              <a:t>•  </a:t>
+            </a:r>
+            <a:r>
+              <a:rPr b="1" dirty="0"/>
+              <a:t>ai/app.py </a:t>
+            </a:r>
+            <a:r>
+              <a:rPr dirty="0"/>
+              <a:t>— application entry point; exposes APIs and sends responses</a:t>
             </a:r>
           </a:p>
           <a:p>
             <a:pPr>
               <a:spcAft>
-                <a:spcPts val="1200"/>
+                <a:spcPts val="1800"/>
               </a:spcAft>
-              <a:defRPr sz="1600">
+              <a:defRPr sz="1800">
                 <a:solidFill>
                   <a:srgbClr val="2A3342"/>
                 </a:solidFill>
@@ -6535,15 +6257,24 @@
               </a:defRPr>
             </a:pPr>
             <a:r>
-              <a:t>•  Hybrid RAG grounds company-specific answers in organization documents</a:t>
+              <a:rPr dirty="0"/>
+              <a:t>•  </a:t>
+            </a:r>
+            <a:r>
+              <a:rPr b="1" dirty="0"/>
+              <a:t>ai/agent.py </a:t>
+            </a:r>
+            <a:r>
+              <a:rPr dirty="0"/>
+              <a:t>— central controller; breaks requests into tasks, runs them in parallel, and combines results</a:t>
             </a:r>
           </a:p>
           <a:p>
             <a:pPr>
               <a:spcAft>
-                <a:spcPts val="1200"/>
+                <a:spcPts val="1800"/>
               </a:spcAft>
-              <a:defRPr sz="1600">
+              <a:defRPr sz="1800">
                 <a:solidFill>
                   <a:srgbClr val="2A3342"/>
                 </a:solidFill>
@@ -6551,15 +6282,24 @@
               </a:defRPr>
             </a:pPr>
             <a:r>
-              <a:t>•  Tools retrieve chit, finance, profile, and policy information</a:t>
+              <a:rPr dirty="0"/>
+              <a:t>•  </a:t>
+            </a:r>
+            <a:r>
+              <a:rPr b="1" dirty="0"/>
+              <a:t>ai/context_router.py </a:t>
+            </a:r>
+            <a:r>
+              <a:rPr dirty="0"/>
+              <a:t>— quickly identifies greetings, capability questions, follow-ups, and personal vs. general queries without an LLM</a:t>
             </a:r>
           </a:p>
           <a:p>
             <a:pPr>
               <a:spcAft>
-                <a:spcPts val="1200"/>
+                <a:spcPts val="1800"/>
               </a:spcAft>
-              <a:defRPr sz="1600">
+              <a:defRPr sz="1800">
                 <a:solidFill>
                   <a:srgbClr val="2A3342"/>
                 </a:solidFill>
@@ -6567,21 +6307,30 @@
               </a:defRPr>
             </a:pPr>
             <a:r>
-              <a:t>•  Telemetry and feedback support monitoring and continuous improvement</a:t>
-            </a:r>
-          </a:p>
-        </p:txBody>
-      </p:sp>
-      <p:sp>
-        <p:nvSpPr>
-          <p:cNvPr id="5" name="TextBox 4"/>
+              <a:rPr dirty="0"/>
+              <a:t>•  </a:t>
+            </a:r>
+            <a:r>
+              <a:rPr b="1" dirty="0"/>
+              <a:t>ai/chatbot.py </a:t>
+            </a:r>
+            <a:r>
+              <a:rPr dirty="0"/>
+              <a:t>— predefined questions, category mapping, intent detection, and Indian Rupee formatting</a:t>
+            </a:r>
+          </a:p>
+        </p:txBody>
+      </p:sp>
+      <p:sp>
+        <p:nvSpPr>
+          <p:cNvPr id="6" name="TextBox 5"/>
           <p:cNvSpPr txBox="1"/>
           <p:nvPr/>
         </p:nvSpPr>
         <p:spPr>
           <a:xfrm>
-            <a:off x="502920" y="6510528"/>
-            <a:ext cx="7772400" cy="164592"/>
+            <a:off x="11109960" y="6473952"/>
+            <a:ext cx="502920" cy="228600"/>
           </a:xfrm>
           <a:prstGeom prst="rect">
             <a:avLst/>
@@ -6589,47 +6338,11 @@
           <a:noFill/>
         </p:spPr>
         <p:txBody>
-          <a:bodyPr wrap="square" lIns="0" rIns="0" tIns="0" bIns="0">
+          <a:bodyPr wrap="square" lIns="0" tIns="0" rIns="0" bIns="0">
             <a:spAutoFit/>
           </a:bodyPr>
           <a:lstStyle/>
           <a:p>
-            <a:pPr>
-              <a:defRPr sz="900" b="1">
-                <a:solidFill>
-                  <a:srgbClr val="636F82"/>
-                </a:solidFill>
-                <a:latin typeface="Aptos"/>
-              </a:defRPr>
-            </a:pPr>
-            <a:r>
-              <a:t>AI CHATBOT  •  SYSTEM OVERVIEW</a:t>
-            </a:r>
-          </a:p>
-        </p:txBody>
-      </p:sp>
-      <p:sp>
-        <p:nvSpPr>
-          <p:cNvPr id="6" name="TextBox 5"/>
-          <p:cNvSpPr txBox="1"/>
-          <p:nvPr/>
-        </p:nvSpPr>
-        <p:spPr>
-          <a:xfrm>
-            <a:off x="11109960" y="6473952"/>
-            <a:ext cx="502920" cy="228600"/>
-          </a:xfrm>
-          <a:prstGeom prst="rect">
-            <a:avLst/>
-          </a:prstGeom>
-          <a:noFill/>
-        </p:spPr>
-        <p:txBody>
-          <a:bodyPr wrap="square" lIns="0" rIns="0" tIns="0" bIns="0">
-            <a:spAutoFit/>
-          </a:bodyPr>
-          <a:lstStyle/>
-          <a:p>
             <a:pPr algn="r">
               <a:defRPr sz="1000" b="1">
                 <a:solidFill>
@@ -6639,7 +6352,7 @@
               </a:defRPr>
             </a:pPr>
             <a:r>
-              <a:t>03</a:t>
+              <a:t>04</a:t>
             </a:r>
           </a:p>
         </p:txBody>
@@ -6652,8 +6365,8 @@
 </p:sld>
 </file>
 
-<file path=ppt/slides/slide4.xml><?xml version="1.0" encoding="utf-8"?>
-<p:sld xmlns:a="http://schemas.openxmlformats.org/drawingml/2006/main" xmlns:p="http://schemas.openxmlformats.org/presentationml/2006/main" xmlns:r="http://schemas.openxmlformats.org/officeDocument/2006/relationships">
+<file path=ppt/slides/slide5.xml><?xml version="1.0" encoding="utf-8"?>
+<p:sld xmlns:a="http://schemas.openxmlformats.org/drawingml/2006/main" xmlns:r="http://schemas.openxmlformats.org/officeDocument/2006/relationships" xmlns:p="http://schemas.openxmlformats.org/presentationml/2006/main">
   <p:cSld>
     <p:bg>
       <p:bgPr>
@@ -6669,7 +6382,14 @@
         <p:cNvGrpSpPr/>
         <p:nvPr/>
       </p:nvGrpSpPr>
-      <p:grpSpPr/>
+      <p:grpSpPr>
+        <a:xfrm>
+          <a:off x="0" y="0"/>
+          <a:ext cx="0" cy="0"/>
+          <a:chOff x="0" y="0"/>
+          <a:chExt cx="0" cy="0"/>
+        </a:xfrm>
+      </p:grpSpPr>
       <p:sp>
         <p:nvSpPr>
           <p:cNvPr id="2" name="Rectangle 1"/>
@@ -6685,7 +6405,7 @@
             <a:avLst/>
           </a:prstGeom>
           <a:solidFill>
-            <a:srgbClr val="1DA1A0"/>
+            <a:srgbClr val="2F69BE"/>
           </a:solidFill>
           <a:ln>
             <a:noFill/>
@@ -6710,6 +6430,7 @@
           <a:lstStyle/>
           <a:p>
             <a:pPr algn="ctr"/>
+            <a:endParaRPr/>
           </a:p>
         </p:txBody>
       </p:sp>
@@ -6744,7 +6465,7 @@
               </a:defRPr>
             </a:pPr>
             <a:r>
-              <a:t>Python Backend: Request Flow</a:t>
+              <a:t>Knowledge Base: Hybrid RAG</a:t>
             </a:r>
           </a:p>
         </p:txBody>
@@ -6787,30 +6508,14 @@
           </a:fontRef>
         </p:style>
         <p:txBody>
-          <a:bodyPr rtlCol="0" anchor="ctr" wrap="square" lIns="347472" rIns="292608" tIns="274320" bIns="182880"/>
-          <a:lstStyle/>
-          <a:p>
-            <a:pPr algn="ctr">
-              <a:spcAft>
-                <a:spcPts val="1800"/>
-              </a:spcAft>
-              <a:defRPr sz="1800">
-                <a:solidFill>
-                  <a:srgbClr val="2A3342"/>
-                </a:solidFill>
-                <a:latin typeface="Aptos"/>
-              </a:defRPr>
-            </a:pPr>
-            <a:r>
-              <a:t>•  ai/app.py — application entry point; exposes APIs and sends responses</a:t>
-            </a:r>
-          </a:p>
+          <a:bodyPr wrap="square" lIns="347472" tIns="274320" rIns="292608" bIns="182880" rtlCol="0" anchor="ctr"/>
+          <a:lstStyle/>
           <a:p>
             <a:pPr>
               <a:spcAft>
-                <a:spcPts val="1800"/>
+                <a:spcPts val="1200"/>
               </a:spcAft>
-              <a:defRPr sz="1800">
+              <a:defRPr sz="1600">
                 <a:solidFill>
                   <a:srgbClr val="2A3342"/>
                 </a:solidFill>
@@ -6818,15 +6523,16 @@
               </a:defRPr>
             </a:pPr>
             <a:r>
-              <a:t>•  ai/agent.py — central controller; breaks requests into tasks, runs them in parallel, and combines results</a:t>
+              <a:rPr lang="en-US" b="1" dirty="0"/>
+              <a:t>ai/knowledge.py</a:t>
             </a:r>
           </a:p>
           <a:p>
             <a:pPr>
               <a:spcAft>
-                <a:spcPts val="1800"/>
+                <a:spcPts val="1200"/>
               </a:spcAft>
-              <a:defRPr sz="1800">
+              <a:defRPr sz="1600">
                 <a:solidFill>
                   <a:srgbClr val="2A3342"/>
                 </a:solidFill>
@@ -6834,15 +6540,20 @@
               </a:defRPr>
             </a:pPr>
             <a:r>
-              <a:t>•  ai/context_router.py — quickly identifies greetings, capability questions, follow-ups, and personal vs. general queries without an LLM</a:t>
+              <a:rPr lang="en-US" dirty="0"/>
+              <a:t>•  </a:t>
+            </a:r>
+            <a:r>
+              <a:rPr dirty="0"/>
+              <a:t>reads organization files and splits them into small chunks</a:t>
             </a:r>
           </a:p>
           <a:p>
             <a:pPr>
               <a:spcAft>
-                <a:spcPts val="1800"/>
+                <a:spcPts val="1200"/>
               </a:spcAft>
-              <a:defRPr sz="1800">
+              <a:defRPr sz="1600">
                 <a:solidFill>
                   <a:srgbClr val="2A3342"/>
                 </a:solidFill>
@@ -6850,21 +6561,56 @@
               </a:defRPr>
             </a:pPr>
             <a:r>
-              <a:t>•  ai/chatbot.py — predefined questions, category mapping, intent detection, and Indian Rupee formatting</a:t>
-            </a:r>
-          </a:p>
-        </p:txBody>
-      </p:sp>
-      <p:sp>
-        <p:nvSpPr>
-          <p:cNvPr id="5" name="TextBox 4"/>
+              <a:rPr dirty="0"/>
+              <a:t>•  BM25 keyword search complements vector similarity search</a:t>
+            </a:r>
+          </a:p>
+          <a:p>
+            <a:pPr>
+              <a:spcAft>
+                <a:spcPts val="1200"/>
+              </a:spcAft>
+              <a:defRPr sz="1600">
+                <a:solidFill>
+                  <a:srgbClr val="2A3342"/>
+                </a:solidFill>
+                <a:latin typeface="Aptos"/>
+              </a:defRPr>
+            </a:pPr>
+            <a:r>
+              <a:rPr dirty="0"/>
+              <a:t>•  Weighted hybrid scoring ranks candidate results</a:t>
+            </a:r>
+          </a:p>
+          <a:p>
+            <a:pPr>
+              <a:spcAft>
+                <a:spcPts val="1200"/>
+              </a:spcAft>
+              <a:defRPr sz="1600">
+                <a:solidFill>
+                  <a:srgbClr val="2A3342"/>
+                </a:solidFill>
+                <a:latin typeface="Aptos"/>
+              </a:defRPr>
+            </a:pPr>
+            <a:r>
+              <a:rPr dirty="0"/>
+              <a:t>•  Strict relevance gating prevents unsupported answers; low-relevance queries return a knowledge-base fallback message</a:t>
+            </a:r>
+          </a:p>
+        </p:txBody>
+      </p:sp>
+      <p:sp>
+        <p:nvSpPr>
+          <p:cNvPr id="6" name="TextBox 5"/>
           <p:cNvSpPr txBox="1"/>
           <p:nvPr/>
         </p:nvSpPr>
         <p:spPr>
           <a:xfrm>
-            <a:off x="502920" y="6510528"/>
-            <a:ext cx="7772400" cy="164592"/>
+            <a:off x="11109960" y="6473952"/>
+            <a:ext cx="502920" cy="228600"/>
           </a:xfrm>
           <a:prstGeom prst="rect">
             <a:avLst/>
@@ -6872,47 +6618,11 @@
           <a:noFill/>
         </p:spPr>
         <p:txBody>
-          <a:bodyPr wrap="square" lIns="0" rIns="0" tIns="0" bIns="0">
+          <a:bodyPr wrap="square" lIns="0" tIns="0" rIns="0" bIns="0">
             <a:spAutoFit/>
           </a:bodyPr>
           <a:lstStyle/>
           <a:p>
-            <a:pPr>
-              <a:defRPr sz="900" b="1">
-                <a:solidFill>
-                  <a:srgbClr val="636F82"/>
-                </a:solidFill>
-                <a:latin typeface="Aptos"/>
-              </a:defRPr>
-            </a:pPr>
-            <a:r>
-              <a:t>AI CHATBOT  •  SYSTEM OVERVIEW</a:t>
-            </a:r>
-          </a:p>
-        </p:txBody>
-      </p:sp>
-      <p:sp>
-        <p:nvSpPr>
-          <p:cNvPr id="6" name="TextBox 5"/>
-          <p:cNvSpPr txBox="1"/>
-          <p:nvPr/>
-        </p:nvSpPr>
-        <p:spPr>
-          <a:xfrm>
-            <a:off x="11109960" y="6473952"/>
-            <a:ext cx="502920" cy="228600"/>
-          </a:xfrm>
-          <a:prstGeom prst="rect">
-            <a:avLst/>
-          </a:prstGeom>
-          <a:noFill/>
-        </p:spPr>
-        <p:txBody>
-          <a:bodyPr wrap="square" lIns="0" rIns="0" tIns="0" bIns="0">
-            <a:spAutoFit/>
-          </a:bodyPr>
-          <a:lstStyle/>
-          <a:p>
             <a:pPr algn="r">
               <a:defRPr sz="1000" b="1">
                 <a:solidFill>
@@ -6922,7 +6632,7 @@
               </a:defRPr>
             </a:pPr>
             <a:r>
-              <a:t>04</a:t>
+              <a:t>05</a:t>
             </a:r>
           </a:p>
         </p:txBody>
@@ -6935,8 +6645,8 @@
 </p:sld>
 </file>
 
-<file path=ppt/slides/slide5.xml><?xml version="1.0" encoding="utf-8"?>
-<p:sld xmlns:a="http://schemas.openxmlformats.org/drawingml/2006/main" xmlns:p="http://schemas.openxmlformats.org/presentationml/2006/main" xmlns:r="http://schemas.openxmlformats.org/officeDocument/2006/relationships">
+<file path=ppt/slides/slide6.xml><?xml version="1.0" encoding="utf-8"?>
+<p:sld xmlns:a="http://schemas.openxmlformats.org/drawingml/2006/main" xmlns:r="http://schemas.openxmlformats.org/officeDocument/2006/relationships" xmlns:p="http://schemas.openxmlformats.org/presentationml/2006/main">
   <p:cSld>
     <p:bg>
       <p:bgPr>
@@ -6952,7 +6662,14 @@
         <p:cNvGrpSpPr/>
         <p:nvPr/>
       </p:nvGrpSpPr>
-      <p:grpSpPr/>
+      <p:grpSpPr>
+        <a:xfrm>
+          <a:off x="0" y="0"/>
+          <a:ext cx="0" cy="0"/>
+          <a:chOff x="0" y="0"/>
+          <a:chExt cx="0" cy="0"/>
+        </a:xfrm>
+      </p:grpSpPr>
       <p:sp>
         <p:nvSpPr>
           <p:cNvPr id="2" name="Rectangle 1"/>
@@ -6968,7 +6685,7 @@
             <a:avLst/>
           </a:prstGeom>
           <a:solidFill>
-            <a:srgbClr val="2F69BE"/>
+            <a:srgbClr val="1DA1A0"/>
           </a:solidFill>
           <a:ln>
             <a:noFill/>
@@ -6993,6 +6710,7 @@
           <a:lstStyle/>
           <a:p>
             <a:pPr algn="ctr"/>
+            <a:endParaRPr/>
           </a:p>
         </p:txBody>
       </p:sp>
@@ -7027,7 +6745,7 @@
               </a:defRPr>
             </a:pPr>
             <a:r>
-              <a:t>Knowledge Base: Hybrid RAG</a:t>
+              <a:t>Backend Tools &amp; Response Formatting</a:t>
             </a:r>
           </a:p>
         </p:txBody>
@@ -7040,8 +6758,8 @@
         </p:nvSpPr>
         <p:spPr>
           <a:xfrm>
-            <a:off x="685800" y="1371600"/>
-            <a:ext cx="10835640" cy="4892040"/>
+            <a:off x="594360" y="1325880"/>
+            <a:ext cx="10784840" cy="4800600"/>
           </a:xfrm>
           <a:prstGeom prst="roundRect">
             <a:avLst/>
@@ -7070,12 +6788,12 @@
           </a:fontRef>
         </p:style>
         <p:txBody>
-          <a:bodyPr rtlCol="0" anchor="ctr" wrap="square" lIns="347472" rIns="292608" tIns="274320" bIns="182880"/>
-          <a:lstStyle/>
-          <a:p>
-            <a:pPr algn="ctr">
+          <a:bodyPr wrap="square" lIns="228600" tIns="201168" rIns="201168" bIns="137160" rtlCol="0" anchor="ctr"/>
+          <a:lstStyle/>
+          <a:p>
+            <a:pPr algn="just">
               <a:spcAft>
-                <a:spcPts val="1200"/>
+                <a:spcPts val="1400"/>
               </a:spcAft>
               <a:defRPr sz="1600">
                 <a:solidFill>
@@ -7085,13 +6803,15 @@
               </a:defRPr>
             </a:pPr>
             <a:r>
-              <a:t>•  ai/knowledge.py reads organization files and splits them into small chunks</a:t>
-            </a:r>
-          </a:p>
-          <a:p>
-            <a:pPr>
+              <a:rPr b="1" dirty="0"/>
+              <a:t>ai/tools.py </a:t>
+            </a:r>
+            <a:endParaRPr lang="en-US" b="1" dirty="0"/>
+          </a:p>
+          <a:p>
+            <a:pPr algn="just">
               <a:spcAft>
-                <a:spcPts val="1200"/>
+                <a:spcPts val="1400"/>
               </a:spcAft>
               <a:defRPr sz="1600">
                 <a:solidFill>
@@ -7101,13 +6821,18 @@
               </a:defRPr>
             </a:pPr>
             <a:r>
-              <a:t>•  Local embeddings: fastembed with BAAI/bge-small-en-v1.5 on ONNX CPU; no external API required for embeddings</a:t>
-            </a:r>
-          </a:p>
-          <a:p>
-            <a:pPr>
+              <a:rPr lang="en-US" dirty="0"/>
+              <a:t>P</a:t>
+            </a:r>
+            <a:r>
+              <a:rPr dirty="0"/>
+              <a:t>rovides predefined tools used by the agent</a:t>
+            </a:r>
+          </a:p>
+          <a:p>
+            <a:pPr algn="just">
               <a:spcAft>
-                <a:spcPts val="1200"/>
+                <a:spcPts val="1400"/>
               </a:spcAft>
               <a:defRPr sz="1600">
                 <a:solidFill>
@@ -7117,13 +6842,22 @@
               </a:defRPr>
             </a:pPr>
             <a:r>
-              <a:t>•  BM25 keyword search complements vector similarity search</a:t>
-            </a:r>
-          </a:p>
-          <a:p>
-            <a:pPr>
+              <a:rPr dirty="0"/>
+              <a:t>•  </a:t>
+            </a:r>
+            <a:r>
+              <a:rPr dirty="0" err="1"/>
+              <a:t>get_chit_details</a:t>
+            </a:r>
+            <a:r>
+              <a:rPr dirty="0"/>
+              <a:t> — installments, cycle numbers, auction dates, and statuses</a:t>
+            </a:r>
+          </a:p>
+          <a:p>
+            <a:pPr algn="just">
               <a:spcAft>
-                <a:spcPts val="1200"/>
+                <a:spcPts val="1400"/>
               </a:spcAft>
               <a:defRPr sz="1600">
                 <a:solidFill>
@@ -7133,13 +6867,23 @@
               </a:defRPr>
             </a:pPr>
             <a:r>
-              <a:t>•  Weighted hybrid scoring ranks candidate results</a:t>
-            </a:r>
-          </a:p>
-          <a:p>
-            <a:pPr>
+              <a:rPr dirty="0"/>
+              <a:t>•  </a:t>
+            </a:r>
+            <a:r>
+              <a:rPr dirty="0" err="1"/>
+              <a:t>get_finance_details</a:t>
+            </a:r>
+            <a:r>
+              <a:rPr dirty="0"/>
+              <a:t> — balances, outstanding amounts, overdue dues, and earned dividends</a:t>
+            </a:r>
+            <a:endParaRPr lang="en-US" dirty="0"/>
+          </a:p>
+          <a:p>
+            <a:pPr algn="just">
               <a:spcAft>
-                <a:spcPts val="1200"/>
+                <a:spcPts val="1400"/>
               </a:spcAft>
               <a:defRPr sz="1600">
                 <a:solidFill>
@@ -7149,21 +6893,103 @@
               </a:defRPr>
             </a:pPr>
             <a:r>
-              <a:t>•  Strict relevance gating prevents unsupported answers; low-relevance queries return a knowledge-base fallback message</a:t>
-            </a:r>
-          </a:p>
-        </p:txBody>
-      </p:sp>
-      <p:sp>
-        <p:nvSpPr>
-          <p:cNvPr id="5" name="TextBox 4"/>
+              <a:rPr lang="en-US" dirty="0"/>
+              <a:t>•  </a:t>
+            </a:r>
+            <a:r>
+              <a:rPr lang="en-US" dirty="0" err="1"/>
+              <a:t>get_profile_details</a:t>
+            </a:r>
+            <a:r>
+              <a:rPr lang="en-US" dirty="0"/>
+              <a:t> — member details, branch, KYC verification, and support topics</a:t>
+            </a:r>
+          </a:p>
+          <a:p>
+            <a:pPr algn="just">
+              <a:spcAft>
+                <a:spcPts val="1400"/>
+              </a:spcAft>
+              <a:defRPr sz="1600">
+                <a:solidFill>
+                  <a:srgbClr val="2A3342"/>
+                </a:solidFill>
+                <a:latin typeface="Aptos"/>
+              </a:defRPr>
+            </a:pPr>
+            <a:r>
+              <a:rPr lang="en-US" dirty="0"/>
+              <a:t>•  </a:t>
+            </a:r>
+            <a:r>
+              <a:rPr lang="en-US" dirty="0" err="1"/>
+              <a:t>search_knowledge</a:t>
+            </a:r>
+            <a:r>
+              <a:rPr lang="en-US" dirty="0"/>
+              <a:t> — general chit fund policies</a:t>
+            </a:r>
+          </a:p>
+          <a:p>
+            <a:pPr algn="just">
+              <a:spcAft>
+                <a:spcPts val="1400"/>
+              </a:spcAft>
+              <a:defRPr sz="1600">
+                <a:solidFill>
+                  <a:srgbClr val="2A3342"/>
+                </a:solidFill>
+                <a:latin typeface="Aptos"/>
+              </a:defRPr>
+            </a:pPr>
+            <a:r>
+              <a:rPr lang="en-US" b="1" dirty="0"/>
+              <a:t>ai/composer.py </a:t>
+            </a:r>
+          </a:p>
+          <a:p>
+            <a:pPr algn="just">
+              <a:spcAft>
+                <a:spcPts val="1400"/>
+              </a:spcAft>
+              <a:defRPr sz="1600">
+                <a:solidFill>
+                  <a:srgbClr val="2A3342"/>
+                </a:solidFill>
+                <a:latin typeface="Aptos"/>
+              </a:defRPr>
+            </a:pPr>
+            <a:r>
+              <a:rPr lang="en-US" dirty="0"/>
+              <a:t>Converts raw data into UI-friendly structures so the mobile app can render the right card</a:t>
+            </a:r>
+          </a:p>
+          <a:p>
+            <a:pPr algn="just">
+              <a:spcAft>
+                <a:spcPts val="1400"/>
+              </a:spcAft>
+              <a:defRPr sz="1600">
+                <a:solidFill>
+                  <a:srgbClr val="2A3342"/>
+                </a:solidFill>
+                <a:latin typeface="Aptos"/>
+              </a:defRPr>
+            </a:pPr>
+            <a:endParaRPr dirty="0"/>
+          </a:p>
+        </p:txBody>
+      </p:sp>
+      <p:sp>
+        <p:nvSpPr>
+          <p:cNvPr id="7" name="TextBox 6"/>
           <p:cNvSpPr txBox="1"/>
           <p:nvPr/>
         </p:nvSpPr>
         <p:spPr>
           <a:xfrm>
-            <a:off x="502920" y="6510528"/>
-            <a:ext cx="7772400" cy="164592"/>
+            <a:off x="11109960" y="6473952"/>
+            <a:ext cx="502920" cy="228600"/>
           </a:xfrm>
           <a:prstGeom prst="rect">
             <a:avLst/>
@@ -7171,47 +6997,11 @@
           <a:noFill/>
         </p:spPr>
         <p:txBody>
-          <a:bodyPr wrap="square" lIns="0" rIns="0" tIns="0" bIns="0">
+          <a:bodyPr wrap="square" lIns="0" tIns="0" rIns="0" bIns="0">
             <a:spAutoFit/>
           </a:bodyPr>
           <a:lstStyle/>
           <a:p>
-            <a:pPr>
-              <a:defRPr sz="900" b="1">
-                <a:solidFill>
-                  <a:srgbClr val="636F82"/>
-                </a:solidFill>
-                <a:latin typeface="Aptos"/>
-              </a:defRPr>
-            </a:pPr>
-            <a:r>
-              <a:t>AI CHATBOT  •  SYSTEM OVERVIEW</a:t>
-            </a:r>
-          </a:p>
-        </p:txBody>
-      </p:sp>
-      <p:sp>
-        <p:nvSpPr>
-          <p:cNvPr id="6" name="TextBox 5"/>
-          <p:cNvSpPr txBox="1"/>
-          <p:nvPr/>
-        </p:nvSpPr>
-        <p:spPr>
-          <a:xfrm>
-            <a:off x="11109960" y="6473952"/>
-            <a:ext cx="502920" cy="228600"/>
-          </a:xfrm>
-          <a:prstGeom prst="rect">
-            <a:avLst/>
-          </a:prstGeom>
-          <a:noFill/>
-        </p:spPr>
-        <p:txBody>
-          <a:bodyPr wrap="square" lIns="0" rIns="0" tIns="0" bIns="0">
-            <a:spAutoFit/>
-          </a:bodyPr>
-          <a:lstStyle/>
-          <a:p>
             <a:pPr algn="r">
               <a:defRPr sz="1000" b="1">
                 <a:solidFill>
@@ -7221,7 +7011,7 @@
               </a:defRPr>
             </a:pPr>
             <a:r>
-              <a:t>05</a:t>
+              <a:t>06</a:t>
             </a:r>
           </a:p>
         </p:txBody>
@@ -7234,8 +7024,8 @@
 </p:sld>
 </file>
 
-<file path=ppt/slides/slide6.xml><?xml version="1.0" encoding="utf-8"?>
-<p:sld xmlns:a="http://schemas.openxmlformats.org/drawingml/2006/main" xmlns:p="http://schemas.openxmlformats.org/presentationml/2006/main" xmlns:r="http://schemas.openxmlformats.org/officeDocument/2006/relationships">
+<file path=ppt/slides/slide7.xml><?xml version="1.0" encoding="utf-8"?>
+<p:sld xmlns:a="http://schemas.openxmlformats.org/drawingml/2006/main" xmlns:r="http://schemas.openxmlformats.org/officeDocument/2006/relationships" xmlns:p="http://schemas.openxmlformats.org/presentationml/2006/main">
   <p:cSld>
     <p:bg>
       <p:bgPr>
@@ -7251,7 +7041,14 @@
         <p:cNvGrpSpPr/>
         <p:nvPr/>
       </p:nvGrpSpPr>
-      <p:grpSpPr/>
+      <p:grpSpPr>
+        <a:xfrm>
+          <a:off x="0" y="0"/>
+          <a:ext cx="0" cy="0"/>
+          <a:chOff x="0" y="0"/>
+          <a:chExt cx="0" cy="0"/>
+        </a:xfrm>
+      </p:grpSpPr>
       <p:sp>
         <p:nvSpPr>
           <p:cNvPr id="2" name="Rectangle 1"/>
@@ -7267,7 +7064,7 @@
             <a:avLst/>
           </a:prstGeom>
           <a:solidFill>
-            <a:srgbClr val="1DA1A0"/>
+            <a:srgbClr val="2F69BE"/>
           </a:solidFill>
           <a:ln>
             <a:noFill/>
@@ -7292,6 +7089,7 @@
           <a:lstStyle/>
           <a:p>
             <a:pPr algn="ctr"/>
+            <a:endParaRPr/>
           </a:p>
         </p:txBody>
       </p:sp>
@@ -7326,7 +7124,8 @@
               </a:defRPr>
             </a:pPr>
             <a:r>
-              <a:t>Backend Tools &amp; Response Formatting</a:t>
+              <a:rPr dirty="0"/>
+              <a:t>LLM Selection, Telemetry &amp; Feedback</a:t>
             </a:r>
           </a:p>
         </p:txBody>
@@ -7339,8 +7138,8 @@
         </p:nvSpPr>
         <p:spPr>
           <a:xfrm>
-            <a:off x="594360" y="1325880"/>
-            <a:ext cx="5349240" cy="4800600"/>
+            <a:off x="685800" y="1371600"/>
+            <a:ext cx="10835640" cy="4892040"/>
           </a:xfrm>
           <a:prstGeom prst="roundRect">
             <a:avLst/>
@@ -7369,12 +7168,12 @@
           </a:fontRef>
         </p:style>
         <p:txBody>
-          <a:bodyPr rtlCol="0" anchor="ctr" wrap="square" lIns="228600" rIns="201168" tIns="201168" bIns="137160"/>
-          <a:lstStyle/>
-          <a:p>
-            <a:pPr algn="ctr">
+          <a:bodyPr wrap="square" lIns="347472" tIns="274320" rIns="292608" bIns="182880" rtlCol="0" anchor="ctr"/>
+          <a:lstStyle/>
+          <a:p>
+            <a:pPr algn="just">
               <a:spcAft>
-                <a:spcPts val="1400"/>
+                <a:spcPts val="1200"/>
               </a:spcAft>
               <a:defRPr sz="1600">
                 <a:solidFill>
@@ -7384,13 +7183,57 @@
               </a:defRPr>
             </a:pPr>
             <a:r>
-              <a:t>•  ai/tools.py provides predefined tools used by the agent</a:t>
-            </a:r>
+              <a:rPr b="1" dirty="0"/>
+              <a:t>ai/llm.py </a:t>
+            </a:r>
+            <a:endParaRPr lang="en-US" b="1" dirty="0"/>
+          </a:p>
+          <a:p>
+            <a:pPr algn="just">
+              <a:spcAft>
+                <a:spcPts val="1200"/>
+              </a:spcAft>
+              <a:defRPr sz="1600">
+                <a:solidFill>
+                  <a:srgbClr val="2A3342"/>
+                </a:solidFill>
+                <a:latin typeface="Aptos"/>
+              </a:defRPr>
+            </a:pPr>
+            <a:r>
+              <a:rPr lang="en-US" dirty="0"/>
+              <a:t>•  </a:t>
+            </a:r>
+            <a:r>
+              <a:rPr dirty="0"/>
+              <a:t>can route </a:t>
+            </a:r>
+            <a:r>
+              <a:rPr dirty="0" err="1"/>
+              <a:t>llm.generate</a:t>
+            </a:r>
+            <a:r>
+              <a:rPr dirty="0"/>
+              <a:t>() to OpenAI, Gemini, </a:t>
+            </a:r>
+            <a:r>
+              <a:rPr dirty="0" err="1"/>
+              <a:t>Groq</a:t>
+            </a:r>
+            <a:r>
+              <a:rPr dirty="0"/>
+              <a:t>, Mistral, DeepSeek, or </a:t>
+            </a:r>
+            <a:r>
+              <a:rPr dirty="0" err="1"/>
+              <a:t>xAI</a:t>
+            </a:r>
+            <a:endParaRPr dirty="0"/>
           </a:p>
           <a:p>
             <a:pPr>
               <a:spcAft>
-                <a:spcPts val="1400"/>
+                <a:spcPts val="1200"/>
               </a:spcAft>
               <a:defRPr sz="1600">
                 <a:solidFill>
@@ -7400,13 +7243,14 @@
               </a:defRPr>
             </a:pPr>
             <a:r>
-              <a:t>•  get_chit_details — installments, cycle numbers, auction dates, and statuses</a:t>
+              <a:rPr dirty="0"/>
+              <a:t>•  The AI model can be switched from the settings screen</a:t>
             </a:r>
           </a:p>
           <a:p>
             <a:pPr>
               <a:spcAft>
-                <a:spcPts val="1400"/>
+                <a:spcPts val="1200"/>
               </a:spcAft>
               <a:defRPr sz="1600">
                 <a:solidFill>
@@ -7416,55 +7260,14 @@
               </a:defRPr>
             </a:pPr>
             <a:r>
-              <a:t>•  get_finance_details — balances, outstanding amounts, overdue dues, and earned dividends</a:t>
-            </a:r>
-          </a:p>
-        </p:txBody>
-      </p:sp>
-      <p:sp>
-        <p:nvSpPr>
-          <p:cNvPr id="5" name="Rounded Rectangle 4"/>
-          <p:cNvSpPr/>
-          <p:nvPr/>
-        </p:nvSpPr>
-        <p:spPr>
-          <a:xfrm>
-            <a:off x="6217920" y="1325880"/>
-            <a:ext cx="5349240" cy="4800600"/>
-          </a:xfrm>
-          <a:prstGeom prst="roundRect">
-            <a:avLst/>
-          </a:prstGeom>
-          <a:solidFill>
-            <a:srgbClr val="FFFFFF"/>
-          </a:solidFill>
-          <a:ln>
-            <a:solidFill>
-              <a:srgbClr val="DEE5EF"/>
-            </a:solidFill>
-          </a:ln>
-        </p:spPr>
-        <p:style>
-          <a:lnRef idx="1">
-            <a:schemeClr val="accent1"/>
-          </a:lnRef>
-          <a:fillRef idx="3">
-            <a:schemeClr val="accent1"/>
-          </a:fillRef>
-          <a:effectRef idx="2">
-            <a:schemeClr val="accent1"/>
-          </a:effectRef>
-          <a:fontRef idx="minor">
-            <a:schemeClr val="lt1"/>
-          </a:fontRef>
-        </p:style>
-        <p:txBody>
-          <a:bodyPr rtlCol="0" anchor="ctr" wrap="square" lIns="228600" rIns="201168" tIns="201168" bIns="137160"/>
-          <a:lstStyle/>
-          <a:p>
-            <a:pPr algn="ctr">
+              <a:rPr dirty="0"/>
+              <a:t>•  ai/telemetry.py records timestamps, questions, tool used, TTFT, latency, and token counts</a:t>
+            </a:r>
+          </a:p>
+          <a:p>
+            <a:pPr>
               <a:spcAft>
-                <a:spcPts val="1400"/>
+                <a:spcPts val="1200"/>
               </a:spcAft>
               <a:defRPr sz="1600">
                 <a:solidFill>
@@ -7474,13 +7277,14 @@
               </a:defRPr>
             </a:pPr>
             <a:r>
-              <a:t>•  get_profile_details — member details, branch, KYC verification, and support topics</a:t>
+              <a:rPr dirty="0"/>
+              <a:t>•  TTFT means Time To First Token; latency is total time taken</a:t>
             </a:r>
           </a:p>
           <a:p>
             <a:pPr>
               <a:spcAft>
-                <a:spcPts val="1400"/>
+                <a:spcPts val="1200"/>
               </a:spcAft>
               <a:defRPr sz="1600">
                 <a:solidFill>
@@ -7490,13 +7294,15 @@
               </a:defRPr>
             </a:pPr>
             <a:r>
-              <a:t>•  search_knowledge — general chit fund policies</a:t>
-            </a:r>
+              <a:rPr b="1" dirty="0"/>
+              <a:t> ai/feedback.py</a:t>
+            </a:r>
+            <a:endParaRPr lang="en-US" b="1" dirty="0"/>
           </a:p>
           <a:p>
             <a:pPr>
               <a:spcAft>
-                <a:spcPts val="1400"/>
+                <a:spcPts val="1200"/>
               </a:spcAft>
               <a:defRPr sz="1600">
                 <a:solidFill>
@@ -7506,7 +7312,12 @@
               </a:defRPr>
             </a:pPr>
             <a:r>
-              <a:t>•  ai/composer.py converts raw data into UI-friendly structures so the mobile app can render the right card</a:t>
+              <a:rPr lang="en-US" dirty="0"/>
+              <a:t>•  S</a:t>
+            </a:r>
+            <a:r>
+              <a:rPr dirty="0"/>
+              <a:t>aves user feedback and creates support tickets for follow-up</a:t>
             </a:r>
           </a:p>
         </p:txBody>
@@ -7519,8 +7330,8 @@
         </p:nvSpPr>
         <p:spPr>
           <a:xfrm>
-            <a:off x="502920" y="6510528"/>
-            <a:ext cx="7772400" cy="164592"/>
+            <a:off x="11109960" y="6473952"/>
+            <a:ext cx="502920" cy="228600"/>
           </a:xfrm>
           <a:prstGeom prst="rect">
             <a:avLst/>
@@ -7528,47 +7339,11 @@
           <a:noFill/>
         </p:spPr>
         <p:txBody>
-          <a:bodyPr wrap="square" lIns="0" rIns="0" tIns="0" bIns="0">
+          <a:bodyPr wrap="square" lIns="0" tIns="0" rIns="0" bIns="0">
             <a:spAutoFit/>
           </a:bodyPr>
           <a:lstStyle/>
           <a:p>
-            <a:pPr>
-              <a:defRPr sz="900" b="1">
-                <a:solidFill>
-                  <a:srgbClr val="636F82"/>
-                </a:solidFill>
-                <a:latin typeface="Aptos"/>
-              </a:defRPr>
-            </a:pPr>
-            <a:r>
-              <a:t>AI CHATBOT  •  SYSTEM OVERVIEW</a:t>
-            </a:r>
-          </a:p>
-        </p:txBody>
-      </p:sp>
-      <p:sp>
-        <p:nvSpPr>
-          <p:cNvPr id="7" name="TextBox 6"/>
-          <p:cNvSpPr txBox="1"/>
-          <p:nvPr/>
-        </p:nvSpPr>
-        <p:spPr>
-          <a:xfrm>
-            <a:off x="11109960" y="6473952"/>
-            <a:ext cx="502920" cy="228600"/>
-          </a:xfrm>
-          <a:prstGeom prst="rect">
-            <a:avLst/>
-          </a:prstGeom>
-          <a:noFill/>
-        </p:spPr>
-        <p:txBody>
-          <a:bodyPr wrap="square" lIns="0" rIns="0" tIns="0" bIns="0">
-            <a:spAutoFit/>
-          </a:bodyPr>
-          <a:lstStyle/>
-          <a:p>
             <a:pPr algn="r">
               <a:defRPr sz="1000" b="1">
                 <a:solidFill>
@@ -7578,7 +7353,7 @@
               </a:defRPr>
             </a:pPr>
             <a:r>
-              <a:t>06</a:t>
+              <a:t>07</a:t>
             </a:r>
           </a:p>
         </p:txBody>
@@ -7591,8 +7366,8 @@
 </p:sld>
 </file>
 
-<file path=ppt/slides/slide7.xml><?xml version="1.0" encoding="utf-8"?>
-<p:sld xmlns:a="http://schemas.openxmlformats.org/drawingml/2006/main" xmlns:p="http://schemas.openxmlformats.org/presentationml/2006/main" xmlns:r="http://schemas.openxmlformats.org/officeDocument/2006/relationships">
+<file path=ppt/slides/slide8.xml><?xml version="1.0" encoding="utf-8"?>
+<p:sld xmlns:a="http://schemas.openxmlformats.org/drawingml/2006/main" xmlns:r="http://schemas.openxmlformats.org/officeDocument/2006/relationships" xmlns:p="http://schemas.openxmlformats.org/presentationml/2006/main">
   <p:cSld>
     <p:bg>
       <p:bgPr>
@@ -7608,7 +7383,14 @@
         <p:cNvGrpSpPr/>
         <p:nvPr/>
       </p:nvGrpSpPr>
-      <p:grpSpPr/>
+      <p:grpSpPr>
+        <a:xfrm>
+          <a:off x="0" y="0"/>
+          <a:ext cx="0" cy="0"/>
+          <a:chOff x="0" y="0"/>
+          <a:chExt cx="0" cy="0"/>
+        </a:xfrm>
+      </p:grpSpPr>
       <p:sp>
         <p:nvSpPr>
           <p:cNvPr id="2" name="Rectangle 1"/>
@@ -7624,7 +7406,7 @@
             <a:avLst/>
           </a:prstGeom>
           <a:solidFill>
-            <a:srgbClr val="2F69BE"/>
+            <a:srgbClr val="1DA1A0"/>
           </a:solidFill>
           <a:ln>
             <a:noFill/>
@@ -7649,6 +7431,7 @@
           <a:lstStyle/>
           <a:p>
             <a:pPr algn="ctr"/>
+            <a:endParaRPr/>
           </a:p>
         </p:txBody>
       </p:sp>
@@ -7683,7 +7466,7 @@
               </a:defRPr>
             </a:pPr>
             <a:r>
-              <a:t>LLM Selection, Telemetry &amp; Feedback</a:t>
+              <a:t>Mobile Application Components</a:t>
             </a:r>
           </a:p>
         </p:txBody>
@@ -7696,8 +7479,8 @@
         </p:nvSpPr>
         <p:spPr>
           <a:xfrm>
-            <a:off x="685800" y="1371600"/>
-            <a:ext cx="10835640" cy="4892040"/>
+            <a:off x="594360" y="1325880"/>
+            <a:ext cx="9759604" cy="4800600"/>
           </a:xfrm>
           <a:prstGeom prst="roundRect">
             <a:avLst/>
@@ -7726,12 +7509,12 @@
           </a:fontRef>
         </p:style>
         <p:txBody>
-          <a:bodyPr rtlCol="0" anchor="ctr" wrap="square" lIns="347472" rIns="292608" tIns="274320" bIns="182880"/>
-          <a:lstStyle/>
-          <a:p>
-            <a:pPr algn="ctr">
+          <a:bodyPr wrap="square" lIns="228600" tIns="201168" rIns="201168" bIns="137160" rtlCol="0" anchor="ctr"/>
+          <a:lstStyle/>
+          <a:p>
+            <a:pPr algn="just">
               <a:spcAft>
-                <a:spcPts val="1200"/>
+                <a:spcPts val="1400"/>
               </a:spcAft>
               <a:defRPr sz="1600">
                 <a:solidFill>
@@ -7741,13 +7524,22 @@
               </a:defRPr>
             </a:pPr>
             <a:r>
-              <a:t>•  ai/llm.py can route llm.generate() to OpenAI, Gemini, Groq, Mistral, DeepSeek, or xAI</a:t>
-            </a:r>
-          </a:p>
-          <a:p>
-            <a:pPr>
+              <a:rPr dirty="0"/>
+              <a:t>•</a:t>
+            </a:r>
+            <a:r>
+              <a:rPr b="1" dirty="0"/>
+              <a:t>Chatbot.js </a:t>
+            </a:r>
+            <a:r>
+              <a:rPr dirty="0"/>
+              <a:t>— main chat screen</a:t>
+            </a:r>
+          </a:p>
+          <a:p>
+            <a:pPr algn="just">
               <a:spcAft>
-                <a:spcPts val="1200"/>
+                <a:spcPts val="1400"/>
               </a:spcAft>
               <a:defRPr sz="1600">
                 <a:solidFill>
@@ -7757,13 +7549,22 @@
               </a:defRPr>
             </a:pPr>
             <a:r>
-              <a:t>•  The AI model can be switched from the settings screen</a:t>
-            </a:r>
-          </a:p>
-          <a:p>
-            <a:pPr>
+              <a:rPr dirty="0"/>
+              <a:t>•</a:t>
+            </a:r>
+            <a:r>
+              <a:rPr b="1" dirty="0"/>
+              <a:t>ChatbotKnowledge.js </a:t>
+            </a:r>
+            <a:r>
+              <a:rPr dirty="0"/>
+              <a:t>— admin-only RAG / knowledge-base management</a:t>
+            </a:r>
+          </a:p>
+          <a:p>
+            <a:pPr algn="just">
               <a:spcAft>
-                <a:spcPts val="1200"/>
+                <a:spcPts val="1400"/>
               </a:spcAft>
               <a:defRPr sz="1600">
                 <a:solidFill>
@@ -7773,13 +7574,23 @@
               </a:defRPr>
             </a:pPr>
             <a:r>
-              <a:t>•  ai/telemetry.py records timestamps, questions, tool used, TTFT, latency, and token counts</a:t>
-            </a:r>
-          </a:p>
-          <a:p>
-            <a:pPr>
+              <a:rPr dirty="0"/>
+              <a:t>•</a:t>
+            </a:r>
+            <a:r>
+              <a:rPr b="1" dirty="0"/>
+              <a:t>ChatbotObservability.js </a:t>
+            </a:r>
+            <a:r>
+              <a:rPr dirty="0"/>
+              <a:t>— monitoring dashboard for developers and support teams</a:t>
+            </a:r>
+            <a:endParaRPr lang="en-US" dirty="0"/>
+          </a:p>
+          <a:p>
+            <a:pPr algn="just">
               <a:spcAft>
-                <a:spcPts val="1200"/>
+                <a:spcPts val="1400"/>
               </a:spcAft>
               <a:defRPr sz="1600">
                 <a:solidFill>
@@ -7789,13 +7600,22 @@
               </a:defRPr>
             </a:pPr>
             <a:r>
-              <a:t>•  TTFT means Time To First Token; latency is total time taken</a:t>
-            </a:r>
-          </a:p>
-          <a:p>
-            <a:pPr>
+              <a:rPr lang="en-US" dirty="0"/>
+              <a:t>• </a:t>
+            </a:r>
+            <a:r>
+              <a:rPr lang="en-US" b="1" dirty="0"/>
+              <a:t>ChatbotSettings.js </a:t>
+            </a:r>
+            <a:r>
+              <a:rPr lang="en-US" dirty="0"/>
+              <a:t>— AI model switching</a:t>
+            </a:r>
+          </a:p>
+          <a:p>
+            <a:pPr algn="just">
               <a:spcAft>
-                <a:spcPts val="1200"/>
+                <a:spcPts val="1400"/>
               </a:spcAft>
               <a:defRPr sz="1600">
                 <a:solidFill>
@@ -7805,21 +7625,69 @@
               </a:defRPr>
             </a:pPr>
             <a:r>
-              <a:t>•  ai/feedback.py saves user feedback and creates support tickets for follow-up</a:t>
-            </a:r>
-          </a:p>
-        </p:txBody>
-      </p:sp>
-      <p:sp>
-        <p:nvSpPr>
-          <p:cNvPr id="5" name="TextBox 4"/>
+              <a:rPr lang="en-US" dirty="0"/>
+              <a:t>•  </a:t>
+            </a:r>
+            <a:r>
+              <a:rPr lang="en-US" b="1" dirty="0"/>
+              <a:t>ChatbotService.js</a:t>
+            </a:r>
+            <a:r>
+              <a:rPr lang="en-US" dirty="0"/>
+              <a:t> — communication layer between mobile app and Flask backend</a:t>
+            </a:r>
+          </a:p>
+          <a:p>
+            <a:pPr algn="just">
+              <a:spcAft>
+                <a:spcPts val="1400"/>
+              </a:spcAft>
+              <a:defRPr sz="1600">
+                <a:solidFill>
+                  <a:srgbClr val="2A3342"/>
+                </a:solidFill>
+                <a:latin typeface="Aptos"/>
+              </a:defRPr>
+            </a:pPr>
+            <a:r>
+              <a:rPr lang="en-US" dirty="0"/>
+              <a:t>•  </a:t>
+            </a:r>
+            <a:r>
+              <a:rPr lang="en-US" b="1" dirty="0"/>
+              <a:t>ChatbotAnswerCard.js</a:t>
+            </a:r>
+            <a:r>
+              <a:rPr lang="en-US" dirty="0"/>
+              <a:t> — displays structured visual cards instead of plain text</a:t>
+            </a:r>
+          </a:p>
+          <a:p>
+            <a:pPr algn="just">
+              <a:spcAft>
+                <a:spcPts val="1400"/>
+              </a:spcAft>
+              <a:defRPr sz="1600">
+                <a:solidFill>
+                  <a:srgbClr val="2A3342"/>
+                </a:solidFill>
+                <a:latin typeface="Aptos"/>
+              </a:defRPr>
+            </a:pPr>
+            <a:endParaRPr dirty="0"/>
+          </a:p>
+        </p:txBody>
+      </p:sp>
+      <p:sp>
+        <p:nvSpPr>
+          <p:cNvPr id="7" name="TextBox 6"/>
           <p:cNvSpPr txBox="1"/>
           <p:nvPr/>
         </p:nvSpPr>
         <p:spPr>
           <a:xfrm>
-            <a:off x="502920" y="6510528"/>
-            <a:ext cx="7772400" cy="164592"/>
+            <a:off x="11109960" y="6473952"/>
+            <a:ext cx="502920" cy="228600"/>
           </a:xfrm>
           <a:prstGeom prst="rect">
             <a:avLst/>
@@ -7827,47 +7695,11 @@
           <a:noFill/>
         </p:spPr>
         <p:txBody>
-          <a:bodyPr wrap="square" lIns="0" rIns="0" tIns="0" bIns="0">
+          <a:bodyPr wrap="square" lIns="0" tIns="0" rIns="0" bIns="0">
             <a:spAutoFit/>
           </a:bodyPr>
           <a:lstStyle/>
           <a:p>
-            <a:pPr>
-              <a:defRPr sz="900" b="1">
-                <a:solidFill>
-                  <a:srgbClr val="636F82"/>
-                </a:solidFill>
-                <a:latin typeface="Aptos"/>
-              </a:defRPr>
-            </a:pPr>
-            <a:r>
-              <a:t>AI CHATBOT  •  SYSTEM OVERVIEW</a:t>
-            </a:r>
-          </a:p>
-        </p:txBody>
-      </p:sp>
-      <p:sp>
-        <p:nvSpPr>
-          <p:cNvPr id="6" name="TextBox 5"/>
-          <p:cNvSpPr txBox="1"/>
-          <p:nvPr/>
-        </p:nvSpPr>
-        <p:spPr>
-          <a:xfrm>
-            <a:off x="11109960" y="6473952"/>
-            <a:ext cx="502920" cy="228600"/>
-          </a:xfrm>
-          <a:prstGeom prst="rect">
-            <a:avLst/>
-          </a:prstGeom>
-          <a:noFill/>
-        </p:spPr>
-        <p:txBody>
-          <a:bodyPr wrap="square" lIns="0" rIns="0" tIns="0" bIns="0">
-            <a:spAutoFit/>
-          </a:bodyPr>
-          <a:lstStyle/>
-          <a:p>
             <a:pPr algn="r">
               <a:defRPr sz="1000" b="1">
                 <a:solidFill>
@@ -7877,7 +7709,7 @@
               </a:defRPr>
             </a:pPr>
             <a:r>
-              <a:t>07</a:t>
+              <a:t>08</a:t>
             </a:r>
           </a:p>
         </p:txBody>
@@ -7890,8 +7722,8 @@
 </p:sld>
 </file>
 
-<file path=ppt/slides/slide8.xml><?xml version="1.0" encoding="utf-8"?>
-<p:sld xmlns:a="http://schemas.openxmlformats.org/drawingml/2006/main" xmlns:p="http://schemas.openxmlformats.org/presentationml/2006/main" xmlns:r="http://schemas.openxmlformats.org/officeDocument/2006/relationships">
+<file path=ppt/slides/slide9.xml><?xml version="1.0" encoding="utf-8"?>
+<p:sld xmlns:a="http://schemas.openxmlformats.org/drawingml/2006/main" xmlns:r="http://schemas.openxmlformats.org/officeDocument/2006/relationships" xmlns:p="http://schemas.openxmlformats.org/presentationml/2006/main">
   <p:cSld>
     <p:bg>
       <p:bgPr>
@@ -7907,7 +7739,14 @@
         <p:cNvGrpSpPr/>
         <p:nvPr/>
       </p:nvGrpSpPr>
-      <p:grpSpPr/>
+      <p:grpSpPr>
+        <a:xfrm>
+          <a:off x="0" y="0"/>
+          <a:ext cx="0" cy="0"/>
+          <a:chOff x="0" y="0"/>
+          <a:chExt cx="0" cy="0"/>
+        </a:xfrm>
+      </p:grpSpPr>
       <p:sp>
         <p:nvSpPr>
           <p:cNvPr id="2" name="Rectangle 1"/>
@@ -7923,7 +7762,7 @@
             <a:avLst/>
           </a:prstGeom>
           <a:solidFill>
-            <a:srgbClr val="1DA1A0"/>
+            <a:srgbClr val="2F69BE"/>
           </a:solidFill>
           <a:ln>
             <a:noFill/>
@@ -7948,6 +7787,7 @@
           <a:lstStyle/>
           <a:p>
             <a:pPr algn="ctr"/>
+            <a:endParaRPr/>
           </a:p>
         </p:txBody>
       </p:sp>
@@ -7982,7 +7822,7 @@
               </a:defRPr>
             </a:pPr>
             <a:r>
-              <a:t>Mobile Application Components</a:t>
+              <a:t>Core Chit Fund Platform Features</a:t>
             </a:r>
           </a:p>
         </p:txBody>
@@ -7995,8 +7835,8 @@
         </p:nvSpPr>
         <p:spPr>
           <a:xfrm>
-            <a:off x="594360" y="1325880"/>
-            <a:ext cx="5349240" cy="4800600"/>
+            <a:off x="594359" y="1325880"/>
+            <a:ext cx="10424623" cy="4800600"/>
           </a:xfrm>
           <a:prstGeom prst="roundRect">
             <a:avLst/>
@@ -8025,10 +7865,10 @@
           </a:fontRef>
         </p:style>
         <p:txBody>
-          <a:bodyPr rtlCol="0" anchor="ctr" wrap="square" lIns="228600" rIns="201168" tIns="201168" bIns="137160"/>
-          <a:lstStyle/>
-          <a:p>
-            <a:pPr algn="ctr">
+          <a:bodyPr wrap="square" lIns="228600" tIns="201168" rIns="201168" bIns="137160" rtlCol="0" anchor="ctr"/>
+          <a:lstStyle/>
+          <a:p>
+            <a:pPr algn="just">
               <a:spcAft>
                 <a:spcPts val="1400"/>
               </a:spcAft>
@@ -8040,11 +7880,20 @@
               </a:defRPr>
             </a:pPr>
             <a:r>
-              <a:t>•  Chatbot.js — main chat screen</a:t>
-            </a:r>
-          </a:p>
-          <a:p>
-            <a:pPr>
+              <a:rPr dirty="0"/>
+              <a:t>•  </a:t>
+            </a:r>
+            <a:r>
+              <a:rPr b="1" dirty="0"/>
+              <a:t>Auction.js </a:t>
+            </a:r>
+            <a:r>
+              <a:rPr dirty="0"/>
+              <a:t>— online auctions and live bidding</a:t>
+            </a:r>
+          </a:p>
+          <a:p>
+            <a:pPr algn="just">
               <a:spcAft>
                 <a:spcPts val="1400"/>
               </a:spcAft>
@@ -8056,11 +7905,20 @@
               </a:defRPr>
             </a:pPr>
             <a:r>
-              <a:t>•  ChatbotKnowledge.js — admin-only RAG / knowledge-base management</a:t>
-            </a:r>
-          </a:p>
-          <a:p>
-            <a:pPr>
+              <a:rPr dirty="0"/>
+              <a:t>•  </a:t>
+            </a:r>
+            <a:r>
+              <a:rPr b="1" dirty="0"/>
+              <a:t>ChitESign.js </a:t>
+            </a:r>
+            <a:r>
+              <a:rPr dirty="0"/>
+              <a:t>— digital chit agreements and e-signatures</a:t>
+            </a:r>
+          </a:p>
+          <a:p>
+            <a:pPr algn="just">
               <a:spcAft>
                 <a:spcPts val="1400"/>
               </a:spcAft>
@@ -8072,53 +7930,20 @@
               </a:defRPr>
             </a:pPr>
             <a:r>
-              <a:t>•  ChatbotObservability.js — monitoring dashboard for developers and support teams</a:t>
-            </a:r>
-          </a:p>
-        </p:txBody>
-      </p:sp>
-      <p:sp>
-        <p:nvSpPr>
-          <p:cNvPr id="5" name="Rounded Rectangle 4"/>
-          <p:cNvSpPr/>
-          <p:nvPr/>
-        </p:nvSpPr>
-        <p:spPr>
-          <a:xfrm>
-            <a:off x="6217920" y="1325880"/>
-            <a:ext cx="5349240" cy="4800600"/>
-          </a:xfrm>
-          <a:prstGeom prst="roundRect">
-            <a:avLst/>
-          </a:prstGeom>
-          <a:solidFill>
-            <a:srgbClr val="FFFFFF"/>
-          </a:solidFill>
-          <a:ln>
-            <a:solidFill>
-              <a:srgbClr val="DEE5EF"/>
-            </a:solidFill>
-          </a:ln>
-        </p:spPr>
-        <p:style>
-          <a:lnRef idx="1">
-            <a:schemeClr val="accent1"/>
-          </a:lnRef>
-          <a:fillRef idx="3">
-            <a:schemeClr val="accent1"/>
-          </a:fillRef>
-          <a:effectRef idx="2">
-            <a:schemeClr val="accent1"/>
-          </a:effectRef>
-          <a:fontRef idx="minor">
-            <a:schemeClr val="lt1"/>
-          </a:fontRef>
-        </p:style>
-        <p:txBody>
-          <a:bodyPr rtlCol="0" anchor="ctr" wrap="square" lIns="228600" rIns="201168" tIns="201168" bIns="137160"/>
-          <a:lstStyle/>
-          <a:p>
-            <a:pPr algn="ctr">
+              <a:rPr dirty="0"/>
+              <a:t>•  </a:t>
+            </a:r>
+            <a:r>
+              <a:rPr b="1" dirty="0"/>
+              <a:t>AccountCopyDetailsView.js </a:t>
+            </a:r>
+            <a:r>
+              <a:rPr dirty="0"/>
+              <a:t>— member passbook / ledger history</a:t>
+            </a:r>
+          </a:p>
+          <a:p>
+            <a:pPr algn="just">
               <a:spcAft>
                 <a:spcPts val="1400"/>
               </a:spcAft>
@@ -8130,11 +7955,16 @@
               </a:defRPr>
             </a:pPr>
             <a:r>
-              <a:t>•  ChatbotSettings.js — AI model switching</a:t>
-            </a:r>
-          </a:p>
-          <a:p>
-            <a:pPr>
+              <a:rPr u="sng" dirty="0"/>
+              <a:t>Chit fund mechanics: </a:t>
+            </a:r>
+            <a:r>
+              <a:rPr lang="en-US" dirty="0"/>
+              <a:t>  </a:t>
+            </a:r>
+          </a:p>
+          <a:p>
+            <a:pPr algn="just">
               <a:spcAft>
                 <a:spcPts val="1400"/>
               </a:spcAft>
@@ -8146,11 +7976,26 @@
               </a:defRPr>
             </a:pPr>
             <a:r>
-              <a:t>•  ChatbotService.js — communication layer between mobile app and Flask backend</a:t>
-            </a:r>
-          </a:p>
-          <a:p>
-            <a:pPr>
+              <a:rPr lang="en-US" sz="1600" dirty="0">
+                <a:solidFill>
+                  <a:srgbClr val="2A3342"/>
+                </a:solidFill>
+                <a:latin typeface="Aptos"/>
+              </a:rPr>
+              <a:t>•  </a:t>
+            </a:r>
+            <a:r>
+              <a:rPr lang="en-US" dirty="0"/>
+              <a:t>M</a:t>
+            </a:r>
+            <a:r>
+              <a:rPr dirty="0"/>
+              <a:t>embers contribute fixed monthly installments into a shared pool</a:t>
+            </a:r>
+            <a:endParaRPr lang="en-US" dirty="0"/>
+          </a:p>
+          <a:p>
+            <a:pPr algn="just">
               <a:spcAft>
                 <a:spcPts val="1400"/>
               </a:spcAft>
@@ -8162,21 +8007,70 @@
               </a:defRPr>
             </a:pPr>
             <a:r>
-              <a:t>•  ChatbotAnswerCard.js — displays structured visual cards instead of plain text</a:t>
-            </a:r>
-          </a:p>
-        </p:txBody>
-      </p:sp>
-      <p:sp>
-        <p:nvSpPr>
-          <p:cNvPr id="6" name="TextBox 5"/>
+              <a:rPr lang="en-US" dirty="0"/>
+              <a:t>•  Reverse auction / bidding: Members bid discounts to claim the pooled prize money</a:t>
+            </a:r>
+          </a:p>
+          <a:p>
+            <a:pPr algn="just">
+              <a:spcAft>
+                <a:spcPts val="1400"/>
+              </a:spcAft>
+              <a:defRPr sz="1600">
+                <a:solidFill>
+                  <a:srgbClr val="2A3342"/>
+                </a:solidFill>
+                <a:latin typeface="Aptos"/>
+              </a:defRPr>
+            </a:pPr>
+            <a:r>
+              <a:rPr lang="en-US" dirty="0"/>
+              <a:t>•  Dividends: Bid discount less the foreman’s 5% commission is distributed to reduce subsequent installments</a:t>
+            </a:r>
+          </a:p>
+          <a:p>
+            <a:pPr algn="just">
+              <a:spcAft>
+                <a:spcPts val="1400"/>
+              </a:spcAft>
+              <a:defRPr sz="1600">
+                <a:solidFill>
+                  <a:srgbClr val="2A3342"/>
+                </a:solidFill>
+                <a:latin typeface="Aptos"/>
+              </a:defRPr>
+            </a:pPr>
+            <a:r>
+              <a:rPr lang="en-US" dirty="0"/>
+              <a:t>•  The source document identifies the Chit Funds Act, 1982 as the legal framework</a:t>
+            </a:r>
+          </a:p>
+          <a:p>
+            <a:pPr algn="just">
+              <a:spcAft>
+                <a:spcPts val="1400"/>
+              </a:spcAft>
+              <a:defRPr sz="1600">
+                <a:solidFill>
+                  <a:srgbClr val="2A3342"/>
+                </a:solidFill>
+                <a:latin typeface="Aptos"/>
+              </a:defRPr>
+            </a:pPr>
+            <a:endParaRPr dirty="0"/>
+          </a:p>
+        </p:txBody>
+      </p:sp>
+      <p:sp>
+        <p:nvSpPr>
+          <p:cNvPr id="7" name="TextBox 6"/>
           <p:cNvSpPr txBox="1"/>
           <p:nvPr/>
         </p:nvSpPr>
         <p:spPr>
           <a:xfrm>
-            <a:off x="502920" y="6510528"/>
-            <a:ext cx="7772400" cy="164592"/>
+            <a:off x="11109960" y="6473952"/>
+            <a:ext cx="502920" cy="228600"/>
           </a:xfrm>
           <a:prstGeom prst="rect">
             <a:avLst/>
@@ -8184,416 +8078,7 @@
           <a:noFill/>
         </p:spPr>
         <p:txBody>
-          <a:bodyPr wrap="square" lIns="0" rIns="0" tIns="0" bIns="0">
-            <a:spAutoFit/>
-          </a:bodyPr>
-          <a:lstStyle/>
-          <a:p>
-            <a:pPr>
-              <a:defRPr sz="900" b="1">
-                <a:solidFill>
-                  <a:srgbClr val="636F82"/>
-                </a:solidFill>
-                <a:latin typeface="Aptos"/>
-              </a:defRPr>
-            </a:pPr>
-            <a:r>
-              <a:t>AI CHATBOT  •  SYSTEM OVERVIEW</a:t>
-            </a:r>
-          </a:p>
-        </p:txBody>
-      </p:sp>
-      <p:sp>
-        <p:nvSpPr>
-          <p:cNvPr id="7" name="TextBox 6"/>
-          <p:cNvSpPr txBox="1"/>
-          <p:nvPr/>
-        </p:nvSpPr>
-        <p:spPr>
-          <a:xfrm>
-            <a:off x="11109960" y="6473952"/>
-            <a:ext cx="502920" cy="228600"/>
-          </a:xfrm>
-          <a:prstGeom prst="rect">
-            <a:avLst/>
-          </a:prstGeom>
-          <a:noFill/>
-        </p:spPr>
-        <p:txBody>
-          <a:bodyPr wrap="square" lIns="0" rIns="0" tIns="0" bIns="0">
-            <a:spAutoFit/>
-          </a:bodyPr>
-          <a:lstStyle/>
-          <a:p>
-            <a:pPr algn="r">
-              <a:defRPr sz="1000" b="1">
-                <a:solidFill>
-                  <a:srgbClr val="636F82"/>
-                </a:solidFill>
-                <a:latin typeface="Aptos"/>
-              </a:defRPr>
-            </a:pPr>
-            <a:r>
-              <a:t>08</a:t>
-            </a:r>
-          </a:p>
-        </p:txBody>
-      </p:sp>
-    </p:spTree>
-  </p:cSld>
-  <p:clrMapOvr>
-    <a:masterClrMapping/>
-  </p:clrMapOvr>
-</p:sld>
-</file>
-
-<file path=ppt/slides/slide9.xml><?xml version="1.0" encoding="utf-8"?>
-<p:sld xmlns:a="http://schemas.openxmlformats.org/drawingml/2006/main" xmlns:p="http://schemas.openxmlformats.org/presentationml/2006/main" xmlns:r="http://schemas.openxmlformats.org/officeDocument/2006/relationships">
-  <p:cSld>
-    <p:bg>
-      <p:bgPr>
-        <a:solidFill>
-          <a:srgbClr val="EFF4FA"/>
-        </a:solidFill>
-        <a:effectLst/>
-      </p:bgPr>
-    </p:bg>
-    <p:spTree>
-      <p:nvGrpSpPr>
-        <p:cNvPr id="1" name=""/>
-        <p:cNvGrpSpPr/>
-        <p:nvPr/>
-      </p:nvGrpSpPr>
-      <p:grpSpPr/>
-      <p:sp>
-        <p:nvSpPr>
-          <p:cNvPr id="2" name="Rectangle 1"/>
-          <p:cNvSpPr/>
-          <p:nvPr/>
-        </p:nvSpPr>
-        <p:spPr>
-          <a:xfrm>
-            <a:off x="0" y="0"/>
-            <a:ext cx="12191695" cy="109728"/>
-          </a:xfrm>
-          <a:prstGeom prst="rect">
-            <a:avLst/>
-          </a:prstGeom>
-          <a:solidFill>
-            <a:srgbClr val="2F69BE"/>
-          </a:solidFill>
-          <a:ln>
-            <a:noFill/>
-          </a:ln>
-        </p:spPr>
-        <p:style>
-          <a:lnRef idx="1">
-            <a:schemeClr val="accent1"/>
-          </a:lnRef>
-          <a:fillRef idx="3">
-            <a:schemeClr val="accent1"/>
-          </a:fillRef>
-          <a:effectRef idx="2">
-            <a:schemeClr val="accent1"/>
-          </a:effectRef>
-          <a:fontRef idx="minor">
-            <a:schemeClr val="lt1"/>
-          </a:fontRef>
-        </p:style>
-        <p:txBody>
-          <a:bodyPr rtlCol="0" anchor="ctr"/>
-          <a:lstStyle/>
-          <a:p>
-            <a:pPr algn="ctr"/>
-          </a:p>
-        </p:txBody>
-      </p:sp>
-      <p:sp>
-        <p:nvSpPr>
-          <p:cNvPr id="3" name="TextBox 2"/>
-          <p:cNvSpPr txBox="1"/>
-          <p:nvPr/>
-        </p:nvSpPr>
-        <p:spPr>
-          <a:xfrm>
-            <a:off x="594360" y="438912"/>
-            <a:ext cx="10972800" cy="594360"/>
-          </a:xfrm>
-          <a:prstGeom prst="rect">
-            <a:avLst/>
-          </a:prstGeom>
-          <a:noFill/>
-        </p:spPr>
-        <p:txBody>
-          <a:bodyPr wrap="square" lIns="45720" rIns="45720">
-            <a:spAutoFit/>
-          </a:bodyPr>
-          <a:lstStyle/>
-          <a:p>
-            <a:pPr>
-              <a:defRPr sz="2900" b="1">
-                <a:solidFill>
-                  <a:srgbClr val="142242"/>
-                </a:solidFill>
-                <a:latin typeface="Aptos"/>
-              </a:defRPr>
-            </a:pPr>
-            <a:r>
-              <a:t>Core Chit Fund Platform Features</a:t>
-            </a:r>
-          </a:p>
-        </p:txBody>
-      </p:sp>
-      <p:sp>
-        <p:nvSpPr>
-          <p:cNvPr id="4" name="Rounded Rectangle 3"/>
-          <p:cNvSpPr/>
-          <p:nvPr/>
-        </p:nvSpPr>
-        <p:spPr>
-          <a:xfrm>
-            <a:off x="594360" y="1325880"/>
-            <a:ext cx="5349240" cy="4800600"/>
-          </a:xfrm>
-          <a:prstGeom prst="roundRect">
-            <a:avLst/>
-          </a:prstGeom>
-          <a:solidFill>
-            <a:srgbClr val="FFFFFF"/>
-          </a:solidFill>
-          <a:ln>
-            <a:solidFill>
-              <a:srgbClr val="DEE5EF"/>
-            </a:solidFill>
-          </a:ln>
-        </p:spPr>
-        <p:style>
-          <a:lnRef idx="1">
-            <a:schemeClr val="accent1"/>
-          </a:lnRef>
-          <a:fillRef idx="3">
-            <a:schemeClr val="accent1"/>
-          </a:fillRef>
-          <a:effectRef idx="2">
-            <a:schemeClr val="accent1"/>
-          </a:effectRef>
-          <a:fontRef idx="minor">
-            <a:schemeClr val="lt1"/>
-          </a:fontRef>
-        </p:style>
-        <p:txBody>
-          <a:bodyPr rtlCol="0" anchor="ctr" wrap="square" lIns="228600" rIns="201168" tIns="201168" bIns="137160"/>
-          <a:lstStyle/>
-          <a:p>
-            <a:pPr algn="ctr">
-              <a:spcAft>
-                <a:spcPts val="1400"/>
-              </a:spcAft>
-              <a:defRPr sz="1600">
-                <a:solidFill>
-                  <a:srgbClr val="2A3342"/>
-                </a:solidFill>
-                <a:latin typeface="Aptos"/>
-              </a:defRPr>
-            </a:pPr>
-            <a:r>
-              <a:t>•  Auction.js — online auctions and live bidding</a:t>
-            </a:r>
-          </a:p>
-          <a:p>
-            <a:pPr>
-              <a:spcAft>
-                <a:spcPts val="1400"/>
-              </a:spcAft>
-              <a:defRPr sz="1600">
-                <a:solidFill>
-                  <a:srgbClr val="2A3342"/>
-                </a:solidFill>
-                <a:latin typeface="Aptos"/>
-              </a:defRPr>
-            </a:pPr>
-            <a:r>
-              <a:t>•  ChitESign.js — digital chit agreements and e-signatures</a:t>
-            </a:r>
-          </a:p>
-          <a:p>
-            <a:pPr>
-              <a:spcAft>
-                <a:spcPts val="1400"/>
-              </a:spcAft>
-              <a:defRPr sz="1600">
-                <a:solidFill>
-                  <a:srgbClr val="2A3342"/>
-                </a:solidFill>
-                <a:latin typeface="Aptos"/>
-              </a:defRPr>
-            </a:pPr>
-            <a:r>
-              <a:t>•  AccountCopyDetailsView.js — member passbook / ledger history</a:t>
-            </a:r>
-          </a:p>
-          <a:p>
-            <a:pPr>
-              <a:spcAft>
-                <a:spcPts val="1400"/>
-              </a:spcAft>
-              <a:defRPr sz="1600">
-                <a:solidFill>
-                  <a:srgbClr val="2A3342"/>
-                </a:solidFill>
-                <a:latin typeface="Aptos"/>
-              </a:defRPr>
-            </a:pPr>
-            <a:r>
-              <a:t>•  Chit fund mechanics: members contribute fixed monthly installments into a shared pool</a:t>
-            </a:r>
-          </a:p>
-        </p:txBody>
-      </p:sp>
-      <p:sp>
-        <p:nvSpPr>
-          <p:cNvPr id="5" name="Rounded Rectangle 4"/>
-          <p:cNvSpPr/>
-          <p:nvPr/>
-        </p:nvSpPr>
-        <p:spPr>
-          <a:xfrm>
-            <a:off x="6217920" y="1325880"/>
-            <a:ext cx="5349240" cy="4800600"/>
-          </a:xfrm>
-          <a:prstGeom prst="roundRect">
-            <a:avLst/>
-          </a:prstGeom>
-          <a:solidFill>
-            <a:srgbClr val="FFFFFF"/>
-          </a:solidFill>
-          <a:ln>
-            <a:solidFill>
-              <a:srgbClr val="DEE5EF"/>
-            </a:solidFill>
-          </a:ln>
-        </p:spPr>
-        <p:style>
-          <a:lnRef idx="1">
-            <a:schemeClr val="accent1"/>
-          </a:lnRef>
-          <a:fillRef idx="3">
-            <a:schemeClr val="accent1"/>
-          </a:fillRef>
-          <a:effectRef idx="2">
-            <a:schemeClr val="accent1"/>
-          </a:effectRef>
-          <a:fontRef idx="minor">
-            <a:schemeClr val="lt1"/>
-          </a:fontRef>
-        </p:style>
-        <p:txBody>
-          <a:bodyPr rtlCol="0" anchor="ctr" wrap="square" lIns="228600" rIns="201168" tIns="201168" bIns="137160"/>
-          <a:lstStyle/>
-          <a:p>
-            <a:pPr algn="ctr">
-              <a:spcAft>
-                <a:spcPts val="1400"/>
-              </a:spcAft>
-              <a:defRPr sz="1600">
-                <a:solidFill>
-                  <a:srgbClr val="2A3342"/>
-                </a:solidFill>
-                <a:latin typeface="Aptos"/>
-              </a:defRPr>
-            </a:pPr>
-            <a:r>
-              <a:t>•  Reverse auction / bidding: members bid discounts to claim the pooled prize money</a:t>
-            </a:r>
-          </a:p>
-          <a:p>
-            <a:pPr>
-              <a:spcAft>
-                <a:spcPts val="1400"/>
-              </a:spcAft>
-              <a:defRPr sz="1600">
-                <a:solidFill>
-                  <a:srgbClr val="2A3342"/>
-                </a:solidFill>
-                <a:latin typeface="Aptos"/>
-              </a:defRPr>
-            </a:pPr>
-            <a:r>
-              <a:t>•  Dividends: bid discount less the foreman’s 5% commission is distributed to reduce subsequent installments</a:t>
-            </a:r>
-          </a:p>
-          <a:p>
-            <a:pPr>
-              <a:spcAft>
-                <a:spcPts val="1400"/>
-              </a:spcAft>
-              <a:defRPr sz="1600">
-                <a:solidFill>
-                  <a:srgbClr val="2A3342"/>
-                </a:solidFill>
-                <a:latin typeface="Aptos"/>
-              </a:defRPr>
-            </a:pPr>
-            <a:r>
-              <a:t>•  The source document identifies the Chit Funds Act, 1982 as the legal framework</a:t>
-            </a:r>
-          </a:p>
-        </p:txBody>
-      </p:sp>
-      <p:sp>
-        <p:nvSpPr>
-          <p:cNvPr id="6" name="TextBox 5"/>
-          <p:cNvSpPr txBox="1"/>
-          <p:nvPr/>
-        </p:nvSpPr>
-        <p:spPr>
-          <a:xfrm>
-            <a:off x="502920" y="6510528"/>
-            <a:ext cx="7772400" cy="164592"/>
-          </a:xfrm>
-          <a:prstGeom prst="rect">
-            <a:avLst/>
-          </a:prstGeom>
-          <a:noFill/>
-        </p:spPr>
-        <p:txBody>
-          <a:bodyPr wrap="square" lIns="0" rIns="0" tIns="0" bIns="0">
-            <a:spAutoFit/>
-          </a:bodyPr>
-          <a:lstStyle/>
-          <a:p>
-            <a:pPr>
-              <a:defRPr sz="900" b="1">
-                <a:solidFill>
-                  <a:srgbClr val="636F82"/>
-                </a:solidFill>
-                <a:latin typeface="Aptos"/>
-              </a:defRPr>
-            </a:pPr>
-            <a:r>
-              <a:t>AI CHATBOT  •  SYSTEM OVERVIEW</a:t>
-            </a:r>
-          </a:p>
-        </p:txBody>
-      </p:sp>
-      <p:sp>
-        <p:nvSpPr>
-          <p:cNvPr id="7" name="TextBox 6"/>
-          <p:cNvSpPr txBox="1"/>
-          <p:nvPr/>
-        </p:nvSpPr>
-        <p:spPr>
-          <a:xfrm>
-            <a:off x="11109960" y="6473952"/>
-            <a:ext cx="502920" cy="228600"/>
-          </a:xfrm>
-          <a:prstGeom prst="rect">
-            <a:avLst/>
-          </a:prstGeom>
-          <a:noFill/>
-        </p:spPr>
-        <p:txBody>
-          <a:bodyPr wrap="square" lIns="0" rIns="0" tIns="0" bIns="0">
+          <a:bodyPr wrap="square" lIns="0" tIns="0" rIns="0" bIns="0">
             <a:spAutoFit/>
           </a:bodyPr>
           <a:lstStyle/>
